--- a/slides/modules/m18-registry-images-catalog-governance.pptx
+++ b/slides/modules/m18-registry-images-catalog-governance.pptx
@@ -13,6 +13,7 @@
     <p:sldId id="261" r:id="rId13"/>
     <p:sldId id="262" r:id="rId14"/>
     <p:sldId id="263" r:id="rId15"/>
+    <p:sldId id="264" r:id="rId16"/>
   </p:sldIdLst>
   <p:sldSz cx="12191695" cy="6858000" type="screen4x3"/>
   <p:notesSz cx="6858000" cy="9144000"/>
@@ -930,6 +931,76 @@
           <a:p>
             <a:r>
               <a:t>Set expectations for the hands-on, all in the attendee's own claims namespace, then land the transfer. You tour the internal registry and the seeded parasol-claims stream, reading its immutable digest and Local pull-through; promote 1.0 to prod and prove the two names share a sha256; make an external base image stay current with a scheduled import and read a real import failure — "name unknown: Repo not found" — instead of guessing; wire a pull secret to a workload two ways (ServiceAccount link and pod-level imagePullSecrets); publish a namespaced Template that appears in your catalog alone and deploy from it; and read the cluster-wide governance surface — where images may come from, what's pruned, what the catalog offers. Take the questions back: when you "promote to prod," can you prove by digest it's the image you tested? Where can images in your cluster come from, and who decided? And who curates your catalog — is the blessed starter actually in it, or is it just whatever shipped?</a:t>
+            </a:r>
+          </a:p>
+        </p:txBody>
+      </p:sp>
+      <p:sp>
+        <p:nvSpPr>
+          <p:cNvPr id="4" name="Slide Number Placeholder 3"/>
+          <p:cNvSpPr>
+            <a:spLocks noGrp="1"/>
+          </p:cNvSpPr>
+          <p:nvPr>
+            <p:ph type="sldNum" idx="5" sz="quarter"/>
+          </p:nvPr>
+        </p:nvSpPr>
+        <p:spPr/>
+      </p:sp>
+    </p:spTree>
+  </p:cSld>
+  <p:clrMapOvr>
+    <a:masterClrMapping/>
+  </p:clrMapOvr>
+</p:notes>
+</file>
+
+<file path=ppt/notesSlides/notesSlide8.xml><?xml version="1.0" encoding="utf-8"?>
+<p:notes xmlns:a="http://schemas.openxmlformats.org/drawingml/2006/main" xmlns:p="http://schemas.openxmlformats.org/presentationml/2006/main" xmlns:r="http://schemas.openxmlformats.org/officeDocument/2006/relationships">
+  <p:cSld>
+    <p:spTree>
+      <p:nvGrpSpPr>
+        <p:cNvPr id="1" name=""/>
+        <p:cNvGrpSpPr/>
+        <p:nvPr/>
+      </p:nvGrpSpPr>
+      <p:grpSpPr>
+        <a:xfrm>
+          <a:off x="0" y="0"/>
+          <a:ext cx="0" cy="0"/>
+          <a:chOff x="0" y="0"/>
+          <a:chExt cx="0" cy="0"/>
+        </a:xfrm>
+      </p:grpSpPr>
+      <p:sp>
+        <p:nvSpPr>
+          <p:cNvPr id="2" name="Slide Image Placeholder 1"/>
+          <p:cNvSpPr>
+            <a:spLocks noGrp="1"/>
+          </p:cNvSpPr>
+          <p:nvPr>
+            <p:ph type="sldImg" idx="2"/>
+          </p:nvPr>
+        </p:nvSpPr>
+        <p:spPr/>
+      </p:sp>
+      <p:sp>
+        <p:nvSpPr>
+          <p:cNvPr id="3" name="Notes Placeholder 2"/>
+          <p:cNvSpPr>
+            <a:spLocks noGrp="1"/>
+          </p:cNvSpPr>
+          <p:nvPr>
+            <p:ph type="body" idx="3" sz="quarter"/>
+          </p:nvPr>
+        </p:nvSpPr>
+        <p:spPr/>
+        <p:txBody>
+          <a:bodyPr/>
+          <a:lstStyle/>
+          <a:p>
+            <a:r>
+              <a:t>Concept diagram: What you built.</a:t>
             </a:r>
           </a:p>
         </p:txBody>
@@ -4307,11 +4378,11 @@
         <p:spPr>
           <a:xfrm>
             <a:off x="841248" y="2395728"/>
-            <a:ext cx="5715000" cy="530352"/>
+            <a:ext cx="5138928" cy="786384"/>
           </a:xfrm>
           <a:prstGeom prst="roundRect">
             <a:avLst>
-              <a:gd name="adj" fmla="val 6000"/>
+              <a:gd name="adj" fmla="val 7000"/>
             </a:avLst>
           </a:prstGeom>
           <a:solidFill>
@@ -4346,9 +4417,55 @@
           </a:p>
         </p:txBody>
       </p:sp>
+      <p:sp>
+        <p:nvSpPr>
+          <p:cNvPr id="7" name="Rounded Rectangle 6"/>
+          <p:cNvSpPr/>
+          <p:nvPr/>
+        </p:nvSpPr>
+        <p:spPr>
+          <a:xfrm>
+            <a:off x="987552" y="2532888"/>
+            <a:ext cx="512064" cy="512064"/>
+          </a:xfrm>
+          <a:prstGeom prst="roundRect">
+            <a:avLst>
+              <a:gd name="adj" fmla="val 26000"/>
+            </a:avLst>
+          </a:prstGeom>
+          <a:solidFill>
+            <a:srgbClr val="EE0000"/>
+          </a:solidFill>
+          <a:ln>
+            <a:noFill/>
+          </a:ln>
+          <a:effectLst/>
+        </p:spPr>
+        <p:style>
+          <a:lnRef idx="1">
+            <a:schemeClr val="accent1"/>
+          </a:lnRef>
+          <a:fillRef idx="3">
+            <a:schemeClr val="accent1"/>
+          </a:fillRef>
+          <a:effectRef idx="2">
+            <a:schemeClr val="accent1"/>
+          </a:effectRef>
+          <a:fontRef idx="minor">
+            <a:schemeClr val="lt1"/>
+          </a:fontRef>
+        </p:style>
+        <p:txBody>
+          <a:bodyPr rtlCol="0" anchor="ctr"/>
+          <a:lstStyle/>
+          <a:p>
+            <a:pPr algn="ctr"/>
+          </a:p>
+        </p:txBody>
+      </p:sp>
       <p:pic>
         <p:nvPicPr>
-          <p:cNvPr id="7" name="Picture 6" descr="check_steel.png"/>
+          <p:cNvPr id="8" name="Picture 7" descr="check_white.png"/>
           <p:cNvPicPr>
             <a:picLocks noChangeAspect="1"/>
           </p:cNvPicPr>
@@ -4362,8 +4479,8 @@
         </p:blipFill>
         <p:spPr>
           <a:xfrm>
-            <a:off x="987552" y="2542032"/>
-            <a:ext cx="237744" cy="237744"/>
+            <a:off x="1110447" y="2655783"/>
+            <a:ext cx="266273" cy="266273"/>
           </a:xfrm>
           <a:prstGeom prst="rect">
             <a:avLst/>
@@ -4372,14 +4489,14 @@
       </p:pic>
       <p:sp>
         <p:nvSpPr>
-          <p:cNvPr id="8" name="TextBox 7"/>
+          <p:cNvPr id="9" name="TextBox 8"/>
           <p:cNvSpPr txBox="1"/>
           <p:nvPr/>
         </p:nvSpPr>
         <p:spPr>
           <a:xfrm>
-            <a:off x="1353312" y="2395728"/>
-            <a:ext cx="5029200" cy="530352"/>
+            <a:off x="1627632" y="2395728"/>
+            <a:ext cx="4206240" cy="786384"/>
           </a:xfrm>
           <a:prstGeom prst="rect">
             <a:avLst/>
@@ -4404,7 +4521,7 @@
               </a:spcAft>
             </a:pPr>
             <a:r>
-              <a:rPr sz="1200" b="0">
+              <a:rPr sz="1150" b="0">
                 <a:solidFill>
                   <a:srgbClr val="1A1A1A"/>
                 </a:solidFill>
@@ -4417,18 +4534,18 @@
       </p:sp>
       <p:sp>
         <p:nvSpPr>
-          <p:cNvPr id="9" name="Rounded Rectangle 8"/>
+          <p:cNvPr id="10" name="Rounded Rectangle 9"/>
           <p:cNvSpPr/>
           <p:nvPr/>
         </p:nvSpPr>
         <p:spPr>
           <a:xfrm>
-            <a:off x="841248" y="2999232"/>
-            <a:ext cx="5715000" cy="530352"/>
+            <a:off x="6254496" y="2395728"/>
+            <a:ext cx="5138928" cy="786384"/>
           </a:xfrm>
           <a:prstGeom prst="roundRect">
             <a:avLst>
-              <a:gd name="adj" fmla="val 6000"/>
+              <a:gd name="adj" fmla="val 7000"/>
             </a:avLst>
           </a:prstGeom>
           <a:solidFill>
@@ -4463,9 +4580,55 @@
           </a:p>
         </p:txBody>
       </p:sp>
+      <p:sp>
+        <p:nvSpPr>
+          <p:cNvPr id="11" name="Rounded Rectangle 10"/>
+          <p:cNvSpPr/>
+          <p:nvPr/>
+        </p:nvSpPr>
+        <p:spPr>
+          <a:xfrm>
+            <a:off x="6400800" y="2532888"/>
+            <a:ext cx="512064" cy="512064"/>
+          </a:xfrm>
+          <a:prstGeom prst="roundRect">
+            <a:avLst>
+              <a:gd name="adj" fmla="val 26000"/>
+            </a:avLst>
+          </a:prstGeom>
+          <a:solidFill>
+            <a:srgbClr val="EE0000"/>
+          </a:solidFill>
+          <a:ln>
+            <a:noFill/>
+          </a:ln>
+          <a:effectLst/>
+        </p:spPr>
+        <p:style>
+          <a:lnRef idx="1">
+            <a:schemeClr val="accent1"/>
+          </a:lnRef>
+          <a:fillRef idx="3">
+            <a:schemeClr val="accent1"/>
+          </a:fillRef>
+          <a:effectRef idx="2">
+            <a:schemeClr val="accent1"/>
+          </a:effectRef>
+          <a:fontRef idx="minor">
+            <a:schemeClr val="lt1"/>
+          </a:fontRef>
+        </p:style>
+        <p:txBody>
+          <a:bodyPr rtlCol="0" anchor="ctr"/>
+          <a:lstStyle/>
+          <a:p>
+            <a:pPr algn="ctr"/>
+          </a:p>
+        </p:txBody>
+      </p:sp>
       <p:pic>
         <p:nvPicPr>
-          <p:cNvPr id="10" name="Picture 9" descr="check_steel.png"/>
+          <p:cNvPr id="12" name="Picture 11" descr="check_white.png"/>
           <p:cNvPicPr>
             <a:picLocks noChangeAspect="1"/>
           </p:cNvPicPr>
@@ -4479,8 +4642,8 @@
         </p:blipFill>
         <p:spPr>
           <a:xfrm>
-            <a:off x="987552" y="3145536"/>
-            <a:ext cx="237744" cy="237744"/>
+            <a:off x="6523695" y="2655783"/>
+            <a:ext cx="266273" cy="266273"/>
           </a:xfrm>
           <a:prstGeom prst="rect">
             <a:avLst/>
@@ -4489,14 +4652,14 @@
       </p:pic>
       <p:sp>
         <p:nvSpPr>
-          <p:cNvPr id="11" name="TextBox 10"/>
+          <p:cNvPr id="13" name="TextBox 12"/>
           <p:cNvSpPr txBox="1"/>
           <p:nvPr/>
         </p:nvSpPr>
         <p:spPr>
           <a:xfrm>
-            <a:off x="1353312" y="2999232"/>
-            <a:ext cx="5029200" cy="530352"/>
+            <a:off x="7040880" y="2395728"/>
+            <a:ext cx="4206240" cy="786384"/>
           </a:xfrm>
           <a:prstGeom prst="rect">
             <a:avLst/>
@@ -4521,7 +4684,7 @@
               </a:spcAft>
             </a:pPr>
             <a:r>
-              <a:rPr sz="1200" b="0">
+              <a:rPr sz="1150" b="0">
                 <a:solidFill>
                   <a:srgbClr val="1A1A1A"/>
                 </a:solidFill>
@@ -4534,18 +4697,18 @@
       </p:sp>
       <p:sp>
         <p:nvSpPr>
-          <p:cNvPr id="12" name="Rounded Rectangle 11"/>
+          <p:cNvPr id="14" name="Rounded Rectangle 13"/>
           <p:cNvSpPr/>
           <p:nvPr/>
         </p:nvSpPr>
         <p:spPr>
           <a:xfrm>
-            <a:off x="841248" y="3602736"/>
-            <a:ext cx="5715000" cy="530352"/>
+            <a:off x="841248" y="3328416"/>
+            <a:ext cx="5138928" cy="786384"/>
           </a:xfrm>
           <a:prstGeom prst="roundRect">
             <a:avLst>
-              <a:gd name="adj" fmla="val 6000"/>
+              <a:gd name="adj" fmla="val 7000"/>
             </a:avLst>
           </a:prstGeom>
           <a:solidFill>
@@ -4580,9 +4743,55 @@
           </a:p>
         </p:txBody>
       </p:sp>
+      <p:sp>
+        <p:nvSpPr>
+          <p:cNvPr id="15" name="Rounded Rectangle 14"/>
+          <p:cNvSpPr/>
+          <p:nvPr/>
+        </p:nvSpPr>
+        <p:spPr>
+          <a:xfrm>
+            <a:off x="987552" y="3465576"/>
+            <a:ext cx="512064" cy="512064"/>
+          </a:xfrm>
+          <a:prstGeom prst="roundRect">
+            <a:avLst>
+              <a:gd name="adj" fmla="val 26000"/>
+            </a:avLst>
+          </a:prstGeom>
+          <a:solidFill>
+            <a:srgbClr val="EE0000"/>
+          </a:solidFill>
+          <a:ln>
+            <a:noFill/>
+          </a:ln>
+          <a:effectLst/>
+        </p:spPr>
+        <p:style>
+          <a:lnRef idx="1">
+            <a:schemeClr val="accent1"/>
+          </a:lnRef>
+          <a:fillRef idx="3">
+            <a:schemeClr val="accent1"/>
+          </a:fillRef>
+          <a:effectRef idx="2">
+            <a:schemeClr val="accent1"/>
+          </a:effectRef>
+          <a:fontRef idx="minor">
+            <a:schemeClr val="lt1"/>
+          </a:fontRef>
+        </p:style>
+        <p:txBody>
+          <a:bodyPr rtlCol="0" anchor="ctr"/>
+          <a:lstStyle/>
+          <a:p>
+            <a:pPr algn="ctr"/>
+          </a:p>
+        </p:txBody>
+      </p:sp>
       <p:pic>
         <p:nvPicPr>
-          <p:cNvPr id="13" name="Picture 12" descr="check_steel.png"/>
+          <p:cNvPr id="16" name="Picture 15" descr="check_white.png"/>
           <p:cNvPicPr>
             <a:picLocks noChangeAspect="1"/>
           </p:cNvPicPr>
@@ -4596,8 +4805,8 @@
         </p:blipFill>
         <p:spPr>
           <a:xfrm>
-            <a:off x="987552" y="3749040"/>
-            <a:ext cx="237744" cy="237744"/>
+            <a:off x="1110447" y="3588471"/>
+            <a:ext cx="266273" cy="266273"/>
           </a:xfrm>
           <a:prstGeom prst="rect">
             <a:avLst/>
@@ -4606,14 +4815,14 @@
       </p:pic>
       <p:sp>
         <p:nvSpPr>
-          <p:cNvPr id="14" name="TextBox 13"/>
+          <p:cNvPr id="17" name="TextBox 16"/>
           <p:cNvSpPr txBox="1"/>
           <p:nvPr/>
         </p:nvSpPr>
         <p:spPr>
           <a:xfrm>
-            <a:off x="1353312" y="3602736"/>
-            <a:ext cx="5029200" cy="530352"/>
+            <a:off x="1627632" y="3328416"/>
+            <a:ext cx="4206240" cy="786384"/>
           </a:xfrm>
           <a:prstGeom prst="rect">
             <a:avLst/>
@@ -4638,7 +4847,7 @@
               </a:spcAft>
             </a:pPr>
             <a:r>
-              <a:rPr sz="1200" b="0">
+              <a:rPr sz="1150" b="0">
                 <a:solidFill>
                   <a:srgbClr val="1A1A1A"/>
                 </a:solidFill>
@@ -4651,18 +4860,18 @@
       </p:sp>
       <p:sp>
         <p:nvSpPr>
-          <p:cNvPr id="15" name="Rounded Rectangle 14"/>
+          <p:cNvPr id="18" name="Rounded Rectangle 17"/>
           <p:cNvSpPr/>
           <p:nvPr/>
         </p:nvSpPr>
         <p:spPr>
           <a:xfrm>
-            <a:off x="841248" y="4206240"/>
-            <a:ext cx="5715000" cy="530352"/>
+            <a:off x="6254496" y="3328416"/>
+            <a:ext cx="5138928" cy="786384"/>
           </a:xfrm>
           <a:prstGeom prst="roundRect">
             <a:avLst>
-              <a:gd name="adj" fmla="val 6000"/>
+              <a:gd name="adj" fmla="val 7000"/>
             </a:avLst>
           </a:prstGeom>
           <a:solidFill>
@@ -4697,9 +4906,55 @@
           </a:p>
         </p:txBody>
       </p:sp>
+      <p:sp>
+        <p:nvSpPr>
+          <p:cNvPr id="19" name="Rounded Rectangle 18"/>
+          <p:cNvSpPr/>
+          <p:nvPr/>
+        </p:nvSpPr>
+        <p:spPr>
+          <a:xfrm>
+            <a:off x="6400800" y="3465576"/>
+            <a:ext cx="512064" cy="512064"/>
+          </a:xfrm>
+          <a:prstGeom prst="roundRect">
+            <a:avLst>
+              <a:gd name="adj" fmla="val 26000"/>
+            </a:avLst>
+          </a:prstGeom>
+          <a:solidFill>
+            <a:srgbClr val="EE0000"/>
+          </a:solidFill>
+          <a:ln>
+            <a:noFill/>
+          </a:ln>
+          <a:effectLst/>
+        </p:spPr>
+        <p:style>
+          <a:lnRef idx="1">
+            <a:schemeClr val="accent1"/>
+          </a:lnRef>
+          <a:fillRef idx="3">
+            <a:schemeClr val="accent1"/>
+          </a:fillRef>
+          <a:effectRef idx="2">
+            <a:schemeClr val="accent1"/>
+          </a:effectRef>
+          <a:fontRef idx="minor">
+            <a:schemeClr val="lt1"/>
+          </a:fontRef>
+        </p:style>
+        <p:txBody>
+          <a:bodyPr rtlCol="0" anchor="ctr"/>
+          <a:lstStyle/>
+          <a:p>
+            <a:pPr algn="ctr"/>
+          </a:p>
+        </p:txBody>
+      </p:sp>
       <p:pic>
         <p:nvPicPr>
-          <p:cNvPr id="16" name="Picture 15" descr="check_steel.png"/>
+          <p:cNvPr id="20" name="Picture 19" descr="check_white.png"/>
           <p:cNvPicPr>
             <a:picLocks noChangeAspect="1"/>
           </p:cNvPicPr>
@@ -4713,8 +4968,8 @@
         </p:blipFill>
         <p:spPr>
           <a:xfrm>
-            <a:off x="987552" y="4352544"/>
-            <a:ext cx="237744" cy="237744"/>
+            <a:off x="6523695" y="3588471"/>
+            <a:ext cx="266273" cy="266273"/>
           </a:xfrm>
           <a:prstGeom prst="rect">
             <a:avLst/>
@@ -4723,14 +4978,14 @@
       </p:pic>
       <p:sp>
         <p:nvSpPr>
-          <p:cNvPr id="17" name="TextBox 16"/>
+          <p:cNvPr id="21" name="TextBox 20"/>
           <p:cNvSpPr txBox="1"/>
           <p:nvPr/>
         </p:nvSpPr>
         <p:spPr>
           <a:xfrm>
-            <a:off x="1353312" y="4206240"/>
-            <a:ext cx="5029200" cy="530352"/>
+            <a:off x="7040880" y="3328416"/>
+            <a:ext cx="4206240" cy="786384"/>
           </a:xfrm>
           <a:prstGeom prst="rect">
             <a:avLst/>
@@ -4755,7 +5010,7 @@
               </a:spcAft>
             </a:pPr>
             <a:r>
-              <a:rPr sz="1200" b="0">
+              <a:rPr sz="1150" b="0">
                 <a:solidFill>
                   <a:srgbClr val="1A1A1A"/>
                 </a:solidFill>
@@ -4768,18 +5023,18 @@
       </p:sp>
       <p:sp>
         <p:nvSpPr>
-          <p:cNvPr id="18" name="Rounded Rectangle 17"/>
+          <p:cNvPr id="22" name="Rounded Rectangle 21"/>
           <p:cNvSpPr/>
           <p:nvPr/>
         </p:nvSpPr>
         <p:spPr>
           <a:xfrm>
-            <a:off x="841248" y="4809744"/>
-            <a:ext cx="5715000" cy="530352"/>
+            <a:off x="841248" y="4261104"/>
+            <a:ext cx="5138928" cy="786384"/>
           </a:xfrm>
           <a:prstGeom prst="roundRect">
             <a:avLst>
-              <a:gd name="adj" fmla="val 6000"/>
+              <a:gd name="adj" fmla="val 7000"/>
             </a:avLst>
           </a:prstGeom>
           <a:solidFill>
@@ -4814,9 +5069,55 @@
           </a:p>
         </p:txBody>
       </p:sp>
+      <p:sp>
+        <p:nvSpPr>
+          <p:cNvPr id="23" name="Rounded Rectangle 22"/>
+          <p:cNvSpPr/>
+          <p:nvPr/>
+        </p:nvSpPr>
+        <p:spPr>
+          <a:xfrm>
+            <a:off x="987552" y="4398264"/>
+            <a:ext cx="512064" cy="512064"/>
+          </a:xfrm>
+          <a:prstGeom prst="roundRect">
+            <a:avLst>
+              <a:gd name="adj" fmla="val 26000"/>
+            </a:avLst>
+          </a:prstGeom>
+          <a:solidFill>
+            <a:srgbClr val="EE0000"/>
+          </a:solidFill>
+          <a:ln>
+            <a:noFill/>
+          </a:ln>
+          <a:effectLst/>
+        </p:spPr>
+        <p:style>
+          <a:lnRef idx="1">
+            <a:schemeClr val="accent1"/>
+          </a:lnRef>
+          <a:fillRef idx="3">
+            <a:schemeClr val="accent1"/>
+          </a:fillRef>
+          <a:effectRef idx="2">
+            <a:schemeClr val="accent1"/>
+          </a:effectRef>
+          <a:fontRef idx="minor">
+            <a:schemeClr val="lt1"/>
+          </a:fontRef>
+        </p:style>
+        <p:txBody>
+          <a:bodyPr rtlCol="0" anchor="ctr"/>
+          <a:lstStyle/>
+          <a:p>
+            <a:pPr algn="ctr"/>
+          </a:p>
+        </p:txBody>
+      </p:sp>
       <p:pic>
         <p:nvPicPr>
-          <p:cNvPr id="19" name="Picture 18" descr="check_steel.png"/>
+          <p:cNvPr id="24" name="Picture 23" descr="check_white.png"/>
           <p:cNvPicPr>
             <a:picLocks noChangeAspect="1"/>
           </p:cNvPicPr>
@@ -4830,8 +5131,8 @@
         </p:blipFill>
         <p:spPr>
           <a:xfrm>
-            <a:off x="987552" y="4956048"/>
-            <a:ext cx="237744" cy="237744"/>
+            <a:off x="1110447" y="4521159"/>
+            <a:ext cx="266273" cy="266273"/>
           </a:xfrm>
           <a:prstGeom prst="rect">
             <a:avLst/>
@@ -4840,14 +5141,14 @@
       </p:pic>
       <p:sp>
         <p:nvSpPr>
-          <p:cNvPr id="20" name="TextBox 19"/>
+          <p:cNvPr id="25" name="TextBox 24"/>
           <p:cNvSpPr txBox="1"/>
           <p:nvPr/>
         </p:nvSpPr>
         <p:spPr>
           <a:xfrm>
-            <a:off x="1353312" y="4809744"/>
-            <a:ext cx="5029200" cy="530352"/>
+            <a:off x="1627632" y="4261104"/>
+            <a:ext cx="4206240" cy="786384"/>
           </a:xfrm>
           <a:prstGeom prst="rect">
             <a:avLst/>
@@ -4872,221 +5173,13 @@
               </a:spcAft>
             </a:pPr>
             <a:r>
-              <a:rPr sz="1200" b="0">
+              <a:rPr sz="1150" b="0">
                 <a:solidFill>
                   <a:srgbClr val="1A1A1A"/>
                 </a:solidFill>
                 <a:latin typeface="Red Hat Text"/>
               </a:rPr>
               <a:t>An image reference is a promise — make it provable</a:t>
-            </a:r>
-          </a:p>
-        </p:txBody>
-      </p:sp>
-      <p:sp>
-        <p:nvSpPr>
-          <p:cNvPr id="21" name="Rounded Rectangle 20"/>
-          <p:cNvSpPr/>
-          <p:nvPr/>
-        </p:nvSpPr>
-        <p:spPr>
-          <a:xfrm>
-            <a:off x="6812280" y="2395728"/>
-            <a:ext cx="4538167" cy="2944368"/>
-          </a:xfrm>
-          <a:prstGeom prst="roundRect">
-            <a:avLst>
-              <a:gd name="adj" fmla="val 4000"/>
-            </a:avLst>
-          </a:prstGeom>
-          <a:solidFill>
-            <a:srgbClr val="FFFFFF"/>
-          </a:solidFill>
-          <a:ln w="15240">
-            <a:solidFill>
-              <a:srgbClr val="DDE1E6"/>
-            </a:solidFill>
-          </a:ln>
-          <a:effectLst/>
-        </p:spPr>
-        <p:style>
-          <a:lnRef idx="1">
-            <a:schemeClr val="accent1"/>
-          </a:lnRef>
-          <a:fillRef idx="3">
-            <a:schemeClr val="accent1"/>
-          </a:fillRef>
-          <a:effectRef idx="2">
-            <a:schemeClr val="accent1"/>
-          </a:effectRef>
-          <a:fontRef idx="minor">
-            <a:schemeClr val="lt1"/>
-          </a:fontRef>
-        </p:style>
-        <p:txBody>
-          <a:bodyPr rtlCol="0" anchor="ctr"/>
-          <a:lstStyle/>
-          <a:p>
-            <a:pPr algn="ctr"/>
-          </a:p>
-        </p:txBody>
-      </p:sp>
-      <p:sp>
-        <p:nvSpPr>
-          <p:cNvPr id="22" name="Rounded Rectangle 21"/>
-          <p:cNvSpPr/>
-          <p:nvPr/>
-        </p:nvSpPr>
-        <p:spPr>
-          <a:xfrm>
-            <a:off x="7013448" y="2596896"/>
-            <a:ext cx="1298448" cy="310896"/>
-          </a:xfrm>
-          <a:prstGeom prst="roundRect">
-            <a:avLst>
-              <a:gd name="adj" fmla="val 50000"/>
-            </a:avLst>
-          </a:prstGeom>
-          <a:solidFill>
-            <a:srgbClr val="FCECEC"/>
-          </a:solidFill>
-          <a:ln>
-            <a:noFill/>
-          </a:ln>
-          <a:effectLst/>
-        </p:spPr>
-        <p:style>
-          <a:lnRef idx="1">
-            <a:schemeClr val="accent1"/>
-          </a:lnRef>
-          <a:fillRef idx="3">
-            <a:schemeClr val="accent1"/>
-          </a:fillRef>
-          <a:effectRef idx="2">
-            <a:schemeClr val="accent1"/>
-          </a:effectRef>
-          <a:fontRef idx="minor">
-            <a:schemeClr val="lt1"/>
-          </a:fontRef>
-        </p:style>
-        <p:txBody>
-          <a:bodyPr rtlCol="0" anchor="ctr"/>
-          <a:lstStyle/>
-          <a:p>
-            <a:pPr algn="ctr"/>
-          </a:p>
-        </p:txBody>
-      </p:sp>
-      <p:sp>
-        <p:nvSpPr>
-          <p:cNvPr id="23" name="TextBox 22"/>
-          <p:cNvSpPr txBox="1"/>
-          <p:nvPr/>
-        </p:nvSpPr>
-        <p:spPr>
-          <a:xfrm>
-            <a:off x="7013448" y="2596896"/>
-            <a:ext cx="1298448" cy="310896"/>
-          </a:xfrm>
-          <a:prstGeom prst="rect">
-            <a:avLst/>
-          </a:prstGeom>
-          <a:noFill/>
-        </p:spPr>
-        <p:txBody>
-          <a:bodyPr wrap="none" anchor="ctr" lIns="0" rIns="0" tIns="0" bIns="0">
-            <a:spAutoFit/>
-          </a:bodyPr>
-          <a:lstStyle/>
-          <a:p>
-            <a:pPr algn="ctr">
-              <a:lnSpc>
-                <a:spcPct val="106000"/>
-              </a:lnSpc>
-              <a:spcBef>
-                <a:spcPts val="0"/>
-              </a:spcBef>
-              <a:spcAft>
-                <a:spcPts val="0"/>
-              </a:spcAft>
-            </a:pPr>
-            <a:r>
-              <a:rPr sz="850" b="1">
-                <a:solidFill>
-                  <a:srgbClr val="B80000"/>
-                </a:solidFill>
-                <a:latin typeface="Red Hat Display"/>
-              </a:rPr>
-              <a:t>MEDIA PASS</a:t>
-            </a:r>
-          </a:p>
-        </p:txBody>
-      </p:sp>
-      <p:pic>
-        <p:nvPicPr>
-          <p:cNvPr id="24" name="Picture 23" descr="eye_slate.png"/>
-          <p:cNvPicPr>
-            <a:picLocks noChangeAspect="1"/>
-          </p:cNvPicPr>
-          <p:nvPr/>
-        </p:nvPicPr>
-        <p:blipFill>
-          <a:blip r:embed="rId4"/>
-          <a:stretch>
-            <a:fillRect/>
-          </a:stretch>
-        </p:blipFill>
-        <p:spPr>
-          <a:xfrm>
-            <a:off x="8843619" y="3108960"/>
-            <a:ext cx="475488" cy="475488"/>
-          </a:xfrm>
-          <a:prstGeom prst="rect">
-            <a:avLst/>
-          </a:prstGeom>
-        </p:spPr>
-      </p:pic>
-      <p:sp>
-        <p:nvSpPr>
-          <p:cNvPr id="25" name="TextBox 24"/>
-          <p:cNvSpPr txBox="1"/>
-          <p:nvPr/>
-        </p:nvSpPr>
-        <p:spPr>
-          <a:xfrm>
-            <a:off x="7050024" y="3721608"/>
-            <a:ext cx="4062679" cy="1481328"/>
-          </a:xfrm>
-          <a:prstGeom prst="rect">
-            <a:avLst/>
-          </a:prstGeom>
-          <a:noFill/>
-        </p:spPr>
-        <p:txBody>
-          <a:bodyPr wrap="square" anchor="t" lIns="0" rIns="0" tIns="0" bIns="0">
-            <a:spAutoFit/>
-          </a:bodyPr>
-          <a:lstStyle/>
-          <a:p>
-            <a:pPr algn="l">
-              <a:lnSpc>
-                <a:spcPct val="120000"/>
-              </a:lnSpc>
-              <a:spcBef>
-                <a:spcPts val="0"/>
-              </a:spcBef>
-              <a:spcAft>
-                <a:spcPts val="0"/>
-              </a:spcAft>
-            </a:pPr>
-            <a:r>
-              <a:rPr sz="950" b="0">
-                <a:solidFill>
-                  <a:srgbClr val="8A9099"/>
-                </a:solidFill>
-                <a:latin typeface="Red Hat Text"/>
-              </a:rPr>
-              <a:t>A "before/after" split — left: a lone `prod` tag floating over a registry with a question mark ("is this the image we tested?"); right: the same tag pinned to an immutable sha256, inside a governed supply chain with an amber "policy" gate.</a:t>
             </a:r>
           </a:p>
         </p:txBody>
@@ -5394,7 +5487,7 @@
         <p:spPr>
           <a:xfrm>
             <a:off x="841248" y="2395728"/>
-            <a:ext cx="5715000" cy="530352"/>
+            <a:ext cx="4160520" cy="475488"/>
           </a:xfrm>
           <a:prstGeom prst="roundRect">
             <a:avLst>
@@ -5449,8 +5542,8 @@
         </p:blipFill>
         <p:spPr>
           <a:xfrm>
-            <a:off x="987552" y="2542032"/>
-            <a:ext cx="237744" cy="237744"/>
+            <a:off x="969264" y="2532888"/>
+            <a:ext cx="201168" cy="201168"/>
           </a:xfrm>
           <a:prstGeom prst="rect">
             <a:avLst/>
@@ -5465,8 +5558,8 @@
         </p:nvSpPr>
         <p:spPr>
           <a:xfrm>
-            <a:off x="1353312" y="2395728"/>
-            <a:ext cx="5029200" cy="530352"/>
+            <a:off x="1280160" y="2395728"/>
+            <a:ext cx="3593591" cy="475488"/>
           </a:xfrm>
           <a:prstGeom prst="rect">
             <a:avLst/>
@@ -5491,7 +5584,7 @@
               </a:spcAft>
             </a:pPr>
             <a:r>
-              <a:rPr sz="1200" b="0">
+              <a:rPr sz="1050" b="0">
                 <a:solidFill>
                   <a:srgbClr val="1A1A1A"/>
                 </a:solidFill>
@@ -5510,8 +5603,8 @@
         </p:nvSpPr>
         <p:spPr>
           <a:xfrm>
-            <a:off x="841248" y="2999232"/>
-            <a:ext cx="5715000" cy="530352"/>
+            <a:off x="841248" y="2944368"/>
+            <a:ext cx="4160520" cy="475488"/>
           </a:xfrm>
           <a:prstGeom prst="roundRect">
             <a:avLst>
@@ -5566,8 +5659,8 @@
         </p:blipFill>
         <p:spPr>
           <a:xfrm>
-            <a:off x="987552" y="3145536"/>
-            <a:ext cx="237744" cy="237744"/>
+            <a:off x="969264" y="3081528"/>
+            <a:ext cx="201168" cy="201168"/>
           </a:xfrm>
           <a:prstGeom prst="rect">
             <a:avLst/>
@@ -5582,8 +5675,8 @@
         </p:nvSpPr>
         <p:spPr>
           <a:xfrm>
-            <a:off x="1353312" y="2999232"/>
-            <a:ext cx="5029200" cy="530352"/>
+            <a:off x="1280160" y="2944368"/>
+            <a:ext cx="3593591" cy="475488"/>
           </a:xfrm>
           <a:prstGeom prst="rect">
             <a:avLst/>
@@ -5608,7 +5701,7 @@
               </a:spcAft>
             </a:pPr>
             <a:r>
-              <a:rPr sz="1200" b="0">
+              <a:rPr sz="1050" b="0">
                 <a:solidFill>
                   <a:srgbClr val="1A1A1A"/>
                 </a:solidFill>
@@ -5627,8 +5720,8 @@
         </p:nvSpPr>
         <p:spPr>
           <a:xfrm>
-            <a:off x="841248" y="3602736"/>
-            <a:ext cx="5715000" cy="530352"/>
+            <a:off x="841248" y="3493008"/>
+            <a:ext cx="4160520" cy="475488"/>
           </a:xfrm>
           <a:prstGeom prst="roundRect">
             <a:avLst>
@@ -5683,8 +5776,8 @@
         </p:blipFill>
         <p:spPr>
           <a:xfrm>
-            <a:off x="987552" y="3749040"/>
-            <a:ext cx="237744" cy="237744"/>
+            <a:off x="969264" y="3630168"/>
+            <a:ext cx="201168" cy="201168"/>
           </a:xfrm>
           <a:prstGeom prst="rect">
             <a:avLst/>
@@ -5699,8 +5792,8 @@
         </p:nvSpPr>
         <p:spPr>
           <a:xfrm>
-            <a:off x="1353312" y="3602736"/>
-            <a:ext cx="5029200" cy="530352"/>
+            <a:off x="1280160" y="3493008"/>
+            <a:ext cx="3593591" cy="475488"/>
           </a:xfrm>
           <a:prstGeom prst="rect">
             <a:avLst/>
@@ -5725,7 +5818,7 @@
               </a:spcAft>
             </a:pPr>
             <a:r>
-              <a:rPr sz="1200" b="0">
+              <a:rPr sz="1050" b="0">
                 <a:solidFill>
                   <a:srgbClr val="1A1A1A"/>
                 </a:solidFill>
@@ -5744,8 +5837,8 @@
         </p:nvSpPr>
         <p:spPr>
           <a:xfrm>
-            <a:off x="841248" y="4206240"/>
-            <a:ext cx="5715000" cy="530352"/>
+            <a:off x="841248" y="4041648"/>
+            <a:ext cx="4160520" cy="475488"/>
           </a:xfrm>
           <a:prstGeom prst="roundRect">
             <a:avLst>
@@ -5800,8 +5893,8 @@
         </p:blipFill>
         <p:spPr>
           <a:xfrm>
-            <a:off x="987552" y="4352544"/>
-            <a:ext cx="237744" cy="237744"/>
+            <a:off x="969264" y="4178807"/>
+            <a:ext cx="201168" cy="201168"/>
           </a:xfrm>
           <a:prstGeom prst="rect">
             <a:avLst/>
@@ -5816,8 +5909,8 @@
         </p:nvSpPr>
         <p:spPr>
           <a:xfrm>
-            <a:off x="1353312" y="4206240"/>
-            <a:ext cx="5029200" cy="530352"/>
+            <a:off x="1280160" y="4041648"/>
+            <a:ext cx="3593591" cy="475488"/>
           </a:xfrm>
           <a:prstGeom prst="rect">
             <a:avLst/>
@@ -5842,7 +5935,7 @@
               </a:spcAft>
             </a:pPr>
             <a:r>
-              <a:rPr sz="1200" b="0">
+              <a:rPr sz="1050" b="0">
                 <a:solidFill>
                   <a:srgbClr val="1A1A1A"/>
                 </a:solidFill>
@@ -5861,8 +5954,8 @@
         </p:nvSpPr>
         <p:spPr>
           <a:xfrm>
-            <a:off x="841248" y="4809744"/>
-            <a:ext cx="5715000" cy="530352"/>
+            <a:off x="841248" y="4590288"/>
+            <a:ext cx="4160520" cy="475488"/>
           </a:xfrm>
           <a:prstGeom prst="roundRect">
             <a:avLst>
@@ -5917,8 +6010,8 @@
         </p:blipFill>
         <p:spPr>
           <a:xfrm>
-            <a:off x="987552" y="4956048"/>
-            <a:ext cx="237744" cy="237744"/>
+            <a:off x="969264" y="4727447"/>
+            <a:ext cx="201168" cy="201168"/>
           </a:xfrm>
           <a:prstGeom prst="rect">
             <a:avLst/>
@@ -5933,8 +6026,8 @@
         </p:nvSpPr>
         <p:spPr>
           <a:xfrm>
-            <a:off x="1353312" y="4809744"/>
-            <a:ext cx="5029200" cy="530352"/>
+            <a:off x="1280160" y="4590288"/>
+            <a:ext cx="3593591" cy="475488"/>
           </a:xfrm>
           <a:prstGeom prst="rect">
             <a:avLst/>
@@ -5959,7 +6052,7 @@
               </a:spcAft>
             </a:pPr>
             <a:r>
-              <a:rPr sz="1200" b="0">
+              <a:rPr sz="1050" b="0">
                 <a:solidFill>
                   <a:srgbClr val="1A1A1A"/>
                 </a:solidFill>
@@ -5978,8 +6071,8 @@
         </p:nvSpPr>
         <p:spPr>
           <a:xfrm>
-            <a:off x="6812280" y="2395728"/>
-            <a:ext cx="4538167" cy="2944368"/>
+            <a:off x="5385816" y="2998873"/>
+            <a:ext cx="5964631" cy="1536908"/>
           </a:xfrm>
           <a:prstGeom prst="roundRect">
             <a:avLst>
@@ -6018,100 +6111,9 @@
           </a:p>
         </p:txBody>
       </p:sp>
-      <p:sp>
-        <p:nvSpPr>
-          <p:cNvPr id="22" name="Rounded Rectangle 21"/>
-          <p:cNvSpPr/>
-          <p:nvPr/>
-        </p:nvSpPr>
-        <p:spPr>
-          <a:xfrm>
-            <a:off x="7013448" y="2596896"/>
-            <a:ext cx="1298448" cy="310896"/>
-          </a:xfrm>
-          <a:prstGeom prst="roundRect">
-            <a:avLst>
-              <a:gd name="adj" fmla="val 50000"/>
-            </a:avLst>
-          </a:prstGeom>
-          <a:solidFill>
-            <a:srgbClr val="FCECEC"/>
-          </a:solidFill>
-          <a:ln>
-            <a:noFill/>
-          </a:ln>
-          <a:effectLst/>
-        </p:spPr>
-        <p:style>
-          <a:lnRef idx="1">
-            <a:schemeClr val="accent1"/>
-          </a:lnRef>
-          <a:fillRef idx="3">
-            <a:schemeClr val="accent1"/>
-          </a:fillRef>
-          <a:effectRef idx="2">
-            <a:schemeClr val="accent1"/>
-          </a:effectRef>
-          <a:fontRef idx="minor">
-            <a:schemeClr val="lt1"/>
-          </a:fontRef>
-        </p:style>
-        <p:txBody>
-          <a:bodyPr rtlCol="0" anchor="ctr"/>
-          <a:lstStyle/>
-          <a:p>
-            <a:pPr algn="ctr"/>
-          </a:p>
-        </p:txBody>
-      </p:sp>
-      <p:sp>
-        <p:nvSpPr>
-          <p:cNvPr id="23" name="TextBox 22"/>
-          <p:cNvSpPr txBox="1"/>
-          <p:nvPr/>
-        </p:nvSpPr>
-        <p:spPr>
-          <a:xfrm>
-            <a:off x="7013448" y="2596896"/>
-            <a:ext cx="1298448" cy="310896"/>
-          </a:xfrm>
-          <a:prstGeom prst="rect">
-            <a:avLst/>
-          </a:prstGeom>
-          <a:noFill/>
-        </p:spPr>
-        <p:txBody>
-          <a:bodyPr wrap="none" anchor="ctr" lIns="0" rIns="0" tIns="0" bIns="0">
-            <a:spAutoFit/>
-          </a:bodyPr>
-          <a:lstStyle/>
-          <a:p>
-            <a:pPr algn="ctr">
-              <a:lnSpc>
-                <a:spcPct val="106000"/>
-              </a:lnSpc>
-              <a:spcBef>
-                <a:spcPts val="0"/>
-              </a:spcBef>
-              <a:spcAft>
-                <a:spcPts val="0"/>
-              </a:spcAft>
-            </a:pPr>
-            <a:r>
-              <a:rPr sz="850" b="1">
-                <a:solidFill>
-                  <a:srgbClr val="B80000"/>
-                </a:solidFill>
-                <a:latin typeface="Red Hat Display"/>
-              </a:rPr>
-              <a:t>MEDIA PASS</a:t>
-            </a:r>
-          </a:p>
-        </p:txBody>
-      </p:sp>
       <p:pic>
         <p:nvPicPr>
-          <p:cNvPr id="24" name="Picture 23" descr="eye_slate.png"/>
+          <p:cNvPr id="22" name="Picture 21" descr="01-two-supply-chains.png"/>
           <p:cNvPicPr>
             <a:picLocks noChangeAspect="1"/>
           </p:cNvPicPr>
@@ -6125,62 +6127,17 @@
         </p:blipFill>
         <p:spPr>
           <a:xfrm>
-            <a:off x="8843619" y="3108960"/>
-            <a:ext cx="475488" cy="475488"/>
+            <a:off x="5532120" y="3145177"/>
+            <a:ext cx="5672023" cy="1244300"/>
           </a:xfrm>
           <a:prstGeom prst="rect">
             <a:avLst/>
           </a:prstGeom>
         </p:spPr>
       </p:pic>
-      <p:sp>
-        <p:nvSpPr>
-          <p:cNvPr id="25" name="TextBox 24"/>
-          <p:cNvSpPr txBox="1"/>
-          <p:nvPr/>
-        </p:nvSpPr>
-        <p:spPr>
-          <a:xfrm>
-            <a:off x="7050024" y="3721608"/>
-            <a:ext cx="4062679" cy="1481328"/>
-          </a:xfrm>
-          <a:prstGeom prst="rect">
-            <a:avLst/>
-          </a:prstGeom>
-          <a:noFill/>
-        </p:spPr>
-        <p:txBody>
-          <a:bodyPr wrap="square" anchor="t" lIns="0" rIns="0" tIns="0" bIns="0">
-            <a:spAutoFit/>
-          </a:bodyPr>
-          <a:lstStyle/>
-          <a:p>
-            <a:pPr algn="l">
-              <a:lnSpc>
-                <a:spcPct val="120000"/>
-              </a:lnSpc>
-              <a:spcBef>
-                <a:spcPts val="0"/>
-              </a:spcBef>
-              <a:spcAft>
-                <a:spcPts val="0"/>
-              </a:spcAft>
-            </a:pPr>
-            <a:r>
-              <a:rPr sz="950" b="0">
-                <a:solidFill>
-                  <a:srgbClr val="8A9099"/>
-                </a:solidFill>
-                <a:latin typeface="Red Hat Text"/>
-              </a:rPr>
-              <a:t>Reuse concept diagram registry-images-catalog-governance-...-01-two-supply-chains.svg — the left-to-right image supply with an amber governance gate, and the bottom catalog-supply branch converging on the Developer Catalog.</a:t>
-            </a:r>
-          </a:p>
-        </p:txBody>
-      </p:sp>
       <p:cxnSp>
         <p:nvCxnSpPr>
-          <p:cNvPr id="26" name="Connector 25"/>
+          <p:cNvPr id="23" name="Connector 22"/>
           <p:cNvCxnSpPr/>
           <p:nvPr/>
         </p:nvCxnSpPr>
@@ -6216,7 +6173,7 @@
       </p:cxnSp>
       <p:sp>
         <p:nvSpPr>
-          <p:cNvPr id="27" name="TextBox 26"/>
+          <p:cNvPr id="24" name="TextBox 23"/>
           <p:cNvSpPr txBox="1"/>
           <p:nvPr/>
         </p:nvSpPr>
@@ -6261,7 +6218,7 @@
       </p:sp>
       <p:sp>
         <p:nvSpPr>
-          <p:cNvPr id="28" name="TextBox 27"/>
+          <p:cNvPr id="25" name="TextBox 24"/>
           <p:cNvSpPr txBox="1"/>
           <p:nvPr/>
         </p:nvSpPr>
@@ -6481,7 +6438,7 @@
         <p:spPr>
           <a:xfrm>
             <a:off x="841248" y="2395728"/>
-            <a:ext cx="5715000" cy="530352"/>
+            <a:ext cx="4160520" cy="475488"/>
           </a:xfrm>
           <a:prstGeom prst="roundRect">
             <a:avLst>
@@ -6536,8 +6493,8 @@
         </p:blipFill>
         <p:spPr>
           <a:xfrm>
-            <a:off x="987552" y="2542032"/>
-            <a:ext cx="237744" cy="237744"/>
+            <a:off x="969264" y="2532888"/>
+            <a:ext cx="201168" cy="201168"/>
           </a:xfrm>
           <a:prstGeom prst="rect">
             <a:avLst/>
@@ -6552,8 +6509,8 @@
         </p:nvSpPr>
         <p:spPr>
           <a:xfrm>
-            <a:off x="1353312" y="2395728"/>
-            <a:ext cx="5029200" cy="530352"/>
+            <a:off x="1280160" y="2395728"/>
+            <a:ext cx="3593591" cy="475488"/>
           </a:xfrm>
           <a:prstGeom prst="rect">
             <a:avLst/>
@@ -6578,7 +6535,7 @@
               </a:spcAft>
             </a:pPr>
             <a:r>
-              <a:rPr sz="1200" b="0">
+              <a:rPr sz="1050" b="0">
                 <a:solidFill>
                   <a:srgbClr val="1A1A1A"/>
                 </a:solidFill>
@@ -6597,8 +6554,8 @@
         </p:nvSpPr>
         <p:spPr>
           <a:xfrm>
-            <a:off x="841248" y="2999232"/>
-            <a:ext cx="5715000" cy="530352"/>
+            <a:off x="841248" y="2944368"/>
+            <a:ext cx="4160520" cy="475488"/>
           </a:xfrm>
           <a:prstGeom prst="roundRect">
             <a:avLst>
@@ -6653,8 +6610,8 @@
         </p:blipFill>
         <p:spPr>
           <a:xfrm>
-            <a:off x="987552" y="3145536"/>
-            <a:ext cx="237744" cy="237744"/>
+            <a:off x="969264" y="3081528"/>
+            <a:ext cx="201168" cy="201168"/>
           </a:xfrm>
           <a:prstGeom prst="rect">
             <a:avLst/>
@@ -6669,8 +6626,8 @@
         </p:nvSpPr>
         <p:spPr>
           <a:xfrm>
-            <a:off x="1353312" y="2999232"/>
-            <a:ext cx="5029200" cy="530352"/>
+            <a:off x="1280160" y="2944368"/>
+            <a:ext cx="3593591" cy="475488"/>
           </a:xfrm>
           <a:prstGeom prst="rect">
             <a:avLst/>
@@ -6695,7 +6652,7 @@
               </a:spcAft>
             </a:pPr>
             <a:r>
-              <a:rPr sz="1200" b="0">
+              <a:rPr sz="1050" b="0">
                 <a:solidFill>
                   <a:srgbClr val="1A1A1A"/>
                 </a:solidFill>
@@ -6714,8 +6671,8 @@
         </p:nvSpPr>
         <p:spPr>
           <a:xfrm>
-            <a:off x="841248" y="3602736"/>
-            <a:ext cx="5715000" cy="530352"/>
+            <a:off x="841248" y="3493008"/>
+            <a:ext cx="4160520" cy="475488"/>
           </a:xfrm>
           <a:prstGeom prst="roundRect">
             <a:avLst>
@@ -6770,8 +6727,8 @@
         </p:blipFill>
         <p:spPr>
           <a:xfrm>
-            <a:off x="987552" y="3749040"/>
-            <a:ext cx="237744" cy="237744"/>
+            <a:off x="969264" y="3630168"/>
+            <a:ext cx="201168" cy="201168"/>
           </a:xfrm>
           <a:prstGeom prst="rect">
             <a:avLst/>
@@ -6786,8 +6743,8 @@
         </p:nvSpPr>
         <p:spPr>
           <a:xfrm>
-            <a:off x="1353312" y="3602736"/>
-            <a:ext cx="5029200" cy="530352"/>
+            <a:off x="1280160" y="3493008"/>
+            <a:ext cx="3593591" cy="475488"/>
           </a:xfrm>
           <a:prstGeom prst="rect">
             <a:avLst/>
@@ -6812,7 +6769,7 @@
               </a:spcAft>
             </a:pPr>
             <a:r>
-              <a:rPr sz="1200" b="0">
+              <a:rPr sz="1050" b="0">
                 <a:solidFill>
                   <a:srgbClr val="1A1A1A"/>
                 </a:solidFill>
@@ -6831,8 +6788,8 @@
         </p:nvSpPr>
         <p:spPr>
           <a:xfrm>
-            <a:off x="841248" y="4206240"/>
-            <a:ext cx="5715000" cy="530352"/>
+            <a:off x="841248" y="4041648"/>
+            <a:ext cx="4160520" cy="475488"/>
           </a:xfrm>
           <a:prstGeom prst="roundRect">
             <a:avLst>
@@ -6887,8 +6844,8 @@
         </p:blipFill>
         <p:spPr>
           <a:xfrm>
-            <a:off x="987552" y="4352544"/>
-            <a:ext cx="237744" cy="237744"/>
+            <a:off x="969264" y="4178807"/>
+            <a:ext cx="201168" cy="201168"/>
           </a:xfrm>
           <a:prstGeom prst="rect">
             <a:avLst/>
@@ -6903,8 +6860,8 @@
         </p:nvSpPr>
         <p:spPr>
           <a:xfrm>
-            <a:off x="1353312" y="4206240"/>
-            <a:ext cx="5029200" cy="530352"/>
+            <a:off x="1280160" y="4041648"/>
+            <a:ext cx="3593591" cy="475488"/>
           </a:xfrm>
           <a:prstGeom prst="rect">
             <a:avLst/>
@@ -6929,7 +6886,7 @@
               </a:spcAft>
             </a:pPr>
             <a:r>
-              <a:rPr sz="1200" b="0">
+              <a:rPr sz="1050" b="0">
                 <a:solidFill>
                   <a:srgbClr val="1A1A1A"/>
                 </a:solidFill>
@@ -6948,8 +6905,8 @@
         </p:nvSpPr>
         <p:spPr>
           <a:xfrm>
-            <a:off x="841248" y="4809744"/>
-            <a:ext cx="5715000" cy="530352"/>
+            <a:off x="841248" y="4590288"/>
+            <a:ext cx="4160520" cy="475488"/>
           </a:xfrm>
           <a:prstGeom prst="roundRect">
             <a:avLst>
@@ -7004,8 +6961,8 @@
         </p:blipFill>
         <p:spPr>
           <a:xfrm>
-            <a:off x="987552" y="4956048"/>
-            <a:ext cx="237744" cy="237744"/>
+            <a:off x="969264" y="4727447"/>
+            <a:ext cx="201168" cy="201168"/>
           </a:xfrm>
           <a:prstGeom prst="rect">
             <a:avLst/>
@@ -7020,8 +6977,8 @@
         </p:nvSpPr>
         <p:spPr>
           <a:xfrm>
-            <a:off x="1353312" y="4809744"/>
-            <a:ext cx="5029200" cy="530352"/>
+            <a:off x="1280160" y="4590288"/>
+            <a:ext cx="3593591" cy="475488"/>
           </a:xfrm>
           <a:prstGeom prst="rect">
             <a:avLst/>
@@ -7046,7 +7003,7 @@
               </a:spcAft>
             </a:pPr>
             <a:r>
-              <a:rPr sz="1200" b="0">
+              <a:rPr sz="1050" b="0">
                 <a:solidFill>
                   <a:srgbClr val="1A1A1A"/>
                 </a:solidFill>
@@ -7065,8 +7022,8 @@
         </p:nvSpPr>
         <p:spPr>
           <a:xfrm>
-            <a:off x="6812280" y="2395728"/>
-            <a:ext cx="4538167" cy="2944368"/>
+            <a:off x="5385816" y="2979376"/>
+            <a:ext cx="5964631" cy="1575903"/>
           </a:xfrm>
           <a:prstGeom prst="roundRect">
             <a:avLst>
@@ -7105,100 +7062,9 @@
           </a:p>
         </p:txBody>
       </p:sp>
-      <p:sp>
-        <p:nvSpPr>
-          <p:cNvPr id="22" name="Rounded Rectangle 21"/>
-          <p:cNvSpPr/>
-          <p:nvPr/>
-        </p:nvSpPr>
-        <p:spPr>
-          <a:xfrm>
-            <a:off x="7013448" y="2596896"/>
-            <a:ext cx="1298448" cy="310896"/>
-          </a:xfrm>
-          <a:prstGeom prst="roundRect">
-            <a:avLst>
-              <a:gd name="adj" fmla="val 50000"/>
-            </a:avLst>
-          </a:prstGeom>
-          <a:solidFill>
-            <a:srgbClr val="FCECEC"/>
-          </a:solidFill>
-          <a:ln>
-            <a:noFill/>
-          </a:ln>
-          <a:effectLst/>
-        </p:spPr>
-        <p:style>
-          <a:lnRef idx="1">
-            <a:schemeClr val="accent1"/>
-          </a:lnRef>
-          <a:fillRef idx="3">
-            <a:schemeClr val="accent1"/>
-          </a:fillRef>
-          <a:effectRef idx="2">
-            <a:schemeClr val="accent1"/>
-          </a:effectRef>
-          <a:fontRef idx="minor">
-            <a:schemeClr val="lt1"/>
-          </a:fontRef>
-        </p:style>
-        <p:txBody>
-          <a:bodyPr rtlCol="0" anchor="ctr"/>
-          <a:lstStyle/>
-          <a:p>
-            <a:pPr algn="ctr"/>
-          </a:p>
-        </p:txBody>
-      </p:sp>
-      <p:sp>
-        <p:nvSpPr>
-          <p:cNvPr id="23" name="TextBox 22"/>
-          <p:cNvSpPr txBox="1"/>
-          <p:nvPr/>
-        </p:nvSpPr>
-        <p:spPr>
-          <a:xfrm>
-            <a:off x="7013448" y="2596896"/>
-            <a:ext cx="1298448" cy="310896"/>
-          </a:xfrm>
-          <a:prstGeom prst="rect">
-            <a:avLst/>
-          </a:prstGeom>
-          <a:noFill/>
-        </p:spPr>
-        <p:txBody>
-          <a:bodyPr wrap="none" anchor="ctr" lIns="0" rIns="0" tIns="0" bIns="0">
-            <a:spAutoFit/>
-          </a:bodyPr>
-          <a:lstStyle/>
-          <a:p>
-            <a:pPr algn="ctr">
-              <a:lnSpc>
-                <a:spcPct val="106000"/>
-              </a:lnSpc>
-              <a:spcBef>
-                <a:spcPts val="0"/>
-              </a:spcBef>
-              <a:spcAft>
-                <a:spcPts val="0"/>
-              </a:spcAft>
-            </a:pPr>
-            <a:r>
-              <a:rPr sz="850" b="1">
-                <a:solidFill>
-                  <a:srgbClr val="B80000"/>
-                </a:solidFill>
-                <a:latin typeface="Red Hat Display"/>
-              </a:rPr>
-              <a:t>MEDIA PASS</a:t>
-            </a:r>
-          </a:p>
-        </p:txBody>
-      </p:sp>
       <p:pic>
         <p:nvPicPr>
-          <p:cNvPr id="24" name="Picture 23" descr="eye_slate.png"/>
+          <p:cNvPr id="22" name="Picture 21" descr="02-immutable-promote.png"/>
           <p:cNvPicPr>
             <a:picLocks noChangeAspect="1"/>
           </p:cNvPicPr>
@@ -7212,62 +7078,17 @@
         </p:blipFill>
         <p:spPr>
           <a:xfrm>
-            <a:off x="8843619" y="3108960"/>
-            <a:ext cx="475488" cy="475488"/>
+            <a:off x="5532120" y="3125680"/>
+            <a:ext cx="5672023" cy="1283295"/>
           </a:xfrm>
           <a:prstGeom prst="rect">
             <a:avLst/>
           </a:prstGeom>
         </p:spPr>
       </p:pic>
-      <p:sp>
-        <p:nvSpPr>
-          <p:cNvPr id="25" name="TextBox 24"/>
-          <p:cNvSpPr txBox="1"/>
-          <p:nvPr/>
-        </p:nvSpPr>
-        <p:spPr>
-          <a:xfrm>
-            <a:off x="7050024" y="3721608"/>
-            <a:ext cx="4062679" cy="1481328"/>
-          </a:xfrm>
-          <a:prstGeom prst="rect">
-            <a:avLst/>
-          </a:prstGeom>
-          <a:noFill/>
-        </p:spPr>
-        <p:txBody>
-          <a:bodyPr wrap="square" anchor="t" lIns="0" rIns="0" tIns="0" bIns="0">
-            <a:spAutoFit/>
-          </a:bodyPr>
-          <a:lstStyle/>
-          <a:p>
-            <a:pPr algn="l">
-              <a:lnSpc>
-                <a:spcPct val="120000"/>
-              </a:lnSpc>
-              <a:spcBef>
-                <a:spcPts val="0"/>
-              </a:spcBef>
-              <a:spcAft>
-                <a:spcPts val="0"/>
-              </a:spcAft>
-            </a:pPr>
-            <a:r>
-              <a:rPr sz="950" b="0">
-                <a:solidFill>
-                  <a:srgbClr val="8A9099"/>
-                </a:solidFill>
-                <a:latin typeface="Red Hat Text"/>
-              </a:rPr>
-              <a:t>Reuse concept diagram registry-images-catalog-governance-...-02-immutable-promote.svg — two tag arrows (1.0, prod) converging on one immutable sha256 box, with a "re-push upstream → prod unmoved" side note.</a:t>
-            </a:r>
-          </a:p>
-        </p:txBody>
-      </p:sp>
       <p:cxnSp>
         <p:nvCxnSpPr>
-          <p:cNvPr id="26" name="Connector 25"/>
+          <p:cNvPr id="23" name="Connector 22"/>
           <p:cNvCxnSpPr/>
           <p:nvPr/>
         </p:nvCxnSpPr>
@@ -7303,7 +7124,7 @@
       </p:cxnSp>
       <p:sp>
         <p:nvSpPr>
-          <p:cNvPr id="27" name="TextBox 26"/>
+          <p:cNvPr id="24" name="TextBox 23"/>
           <p:cNvSpPr txBox="1"/>
           <p:nvPr/>
         </p:nvSpPr>
@@ -7348,7 +7169,7 @@
       </p:sp>
       <p:sp>
         <p:nvSpPr>
-          <p:cNvPr id="28" name="TextBox 27"/>
+          <p:cNvPr id="25" name="TextBox 24"/>
           <p:cNvSpPr txBox="1"/>
           <p:nvPr/>
         </p:nvSpPr>
@@ -7613,11 +7434,11 @@
         <p:spPr>
           <a:xfrm>
             <a:off x="841248" y="2670048"/>
-            <a:ext cx="5715000" cy="530352"/>
+            <a:ext cx="5138928" cy="786384"/>
           </a:xfrm>
           <a:prstGeom prst="roundRect">
             <a:avLst>
-              <a:gd name="adj" fmla="val 6000"/>
+              <a:gd name="adj" fmla="val 7000"/>
             </a:avLst>
           </a:prstGeom>
           <a:solidFill>
@@ -7652,9 +7473,55 @@
           </a:p>
         </p:txBody>
       </p:sp>
+      <p:sp>
+        <p:nvSpPr>
+          <p:cNvPr id="8" name="Rounded Rectangle 7"/>
+          <p:cNvSpPr/>
+          <p:nvPr/>
+        </p:nvSpPr>
+        <p:spPr>
+          <a:xfrm>
+            <a:off x="987552" y="2807208"/>
+            <a:ext cx="512064" cy="512064"/>
+          </a:xfrm>
+          <a:prstGeom prst="roundRect">
+            <a:avLst>
+              <a:gd name="adj" fmla="val 26000"/>
+            </a:avLst>
+          </a:prstGeom>
+          <a:solidFill>
+            <a:srgbClr val="EE0000"/>
+          </a:solidFill>
+          <a:ln>
+            <a:noFill/>
+          </a:ln>
+          <a:effectLst/>
+        </p:spPr>
+        <p:style>
+          <a:lnRef idx="1">
+            <a:schemeClr val="accent1"/>
+          </a:lnRef>
+          <a:fillRef idx="3">
+            <a:schemeClr val="accent1"/>
+          </a:fillRef>
+          <a:effectRef idx="2">
+            <a:schemeClr val="accent1"/>
+          </a:effectRef>
+          <a:fontRef idx="minor">
+            <a:schemeClr val="lt1"/>
+          </a:fontRef>
+        </p:style>
+        <p:txBody>
+          <a:bodyPr rtlCol="0" anchor="ctr"/>
+          <a:lstStyle/>
+          <a:p>
+            <a:pPr algn="ctr"/>
+          </a:p>
+        </p:txBody>
+      </p:sp>
       <p:pic>
         <p:nvPicPr>
-          <p:cNvPr id="8" name="Picture 7" descr="check_steel.png"/>
+          <p:cNvPr id="9" name="Picture 8" descr="check_white.png"/>
           <p:cNvPicPr>
             <a:picLocks noChangeAspect="1"/>
           </p:cNvPicPr>
@@ -7668,8 +7535,8 @@
         </p:blipFill>
         <p:spPr>
           <a:xfrm>
-            <a:off x="987552" y="2816352"/>
-            <a:ext cx="237744" cy="237744"/>
+            <a:off x="1110447" y="2930103"/>
+            <a:ext cx="266273" cy="266273"/>
           </a:xfrm>
           <a:prstGeom prst="rect">
             <a:avLst/>
@@ -7678,14 +7545,14 @@
       </p:pic>
       <p:sp>
         <p:nvSpPr>
-          <p:cNvPr id="9" name="TextBox 8"/>
+          <p:cNvPr id="10" name="TextBox 9"/>
           <p:cNvSpPr txBox="1"/>
           <p:nvPr/>
         </p:nvSpPr>
         <p:spPr>
           <a:xfrm>
-            <a:off x="1353312" y="2670048"/>
-            <a:ext cx="5029200" cy="530352"/>
+            <a:off x="1627632" y="2670048"/>
+            <a:ext cx="4206240" cy="786384"/>
           </a:xfrm>
           <a:prstGeom prst="rect">
             <a:avLst/>
@@ -7710,7 +7577,7 @@
               </a:spcAft>
             </a:pPr>
             <a:r>
-              <a:rPr sz="1200" b="0">
+              <a:rPr sz="1150" b="0">
                 <a:solidFill>
                   <a:srgbClr val="1A1A1A"/>
                 </a:solidFill>
@@ -7723,18 +7590,18 @@
       </p:sp>
       <p:sp>
         <p:nvSpPr>
-          <p:cNvPr id="10" name="Rounded Rectangle 9"/>
+          <p:cNvPr id="11" name="Rounded Rectangle 10"/>
           <p:cNvSpPr/>
           <p:nvPr/>
         </p:nvSpPr>
         <p:spPr>
           <a:xfrm>
-            <a:off x="841248" y="3273552"/>
-            <a:ext cx="5715000" cy="530352"/>
+            <a:off x="6254496" y="2670048"/>
+            <a:ext cx="5138928" cy="786384"/>
           </a:xfrm>
           <a:prstGeom prst="roundRect">
             <a:avLst>
-              <a:gd name="adj" fmla="val 6000"/>
+              <a:gd name="adj" fmla="val 7000"/>
             </a:avLst>
           </a:prstGeom>
           <a:solidFill>
@@ -7769,9 +7636,55 @@
           </a:p>
         </p:txBody>
       </p:sp>
+      <p:sp>
+        <p:nvSpPr>
+          <p:cNvPr id="12" name="Rounded Rectangle 11"/>
+          <p:cNvSpPr/>
+          <p:nvPr/>
+        </p:nvSpPr>
+        <p:spPr>
+          <a:xfrm>
+            <a:off x="6400800" y="2807208"/>
+            <a:ext cx="512064" cy="512064"/>
+          </a:xfrm>
+          <a:prstGeom prst="roundRect">
+            <a:avLst>
+              <a:gd name="adj" fmla="val 26000"/>
+            </a:avLst>
+          </a:prstGeom>
+          <a:solidFill>
+            <a:srgbClr val="EE0000"/>
+          </a:solidFill>
+          <a:ln>
+            <a:noFill/>
+          </a:ln>
+          <a:effectLst/>
+        </p:spPr>
+        <p:style>
+          <a:lnRef idx="1">
+            <a:schemeClr val="accent1"/>
+          </a:lnRef>
+          <a:fillRef idx="3">
+            <a:schemeClr val="accent1"/>
+          </a:fillRef>
+          <a:effectRef idx="2">
+            <a:schemeClr val="accent1"/>
+          </a:effectRef>
+          <a:fontRef idx="minor">
+            <a:schemeClr val="lt1"/>
+          </a:fontRef>
+        </p:style>
+        <p:txBody>
+          <a:bodyPr rtlCol="0" anchor="ctr"/>
+          <a:lstStyle/>
+          <a:p>
+            <a:pPr algn="ctr"/>
+          </a:p>
+        </p:txBody>
+      </p:sp>
       <p:pic>
         <p:nvPicPr>
-          <p:cNvPr id="11" name="Picture 10" descr="check_steel.png"/>
+          <p:cNvPr id="13" name="Picture 12" descr="check_white.png"/>
           <p:cNvPicPr>
             <a:picLocks noChangeAspect="1"/>
           </p:cNvPicPr>
@@ -7785,8 +7698,8 @@
         </p:blipFill>
         <p:spPr>
           <a:xfrm>
-            <a:off x="987552" y="3419856"/>
-            <a:ext cx="237744" cy="237744"/>
+            <a:off x="6523695" y="2930103"/>
+            <a:ext cx="266273" cy="266273"/>
           </a:xfrm>
           <a:prstGeom prst="rect">
             <a:avLst/>
@@ -7795,14 +7708,14 @@
       </p:pic>
       <p:sp>
         <p:nvSpPr>
-          <p:cNvPr id="12" name="TextBox 11"/>
+          <p:cNvPr id="14" name="TextBox 13"/>
           <p:cNvSpPr txBox="1"/>
           <p:nvPr/>
         </p:nvSpPr>
         <p:spPr>
           <a:xfrm>
-            <a:off x="1353312" y="3273552"/>
-            <a:ext cx="5029200" cy="530352"/>
+            <a:off x="7040880" y="2670048"/>
+            <a:ext cx="4206240" cy="786384"/>
           </a:xfrm>
           <a:prstGeom prst="rect">
             <a:avLst/>
@@ -7827,7 +7740,7 @@
               </a:spcAft>
             </a:pPr>
             <a:r>
-              <a:rPr sz="1200" b="0">
+              <a:rPr sz="1150" b="0">
                 <a:solidFill>
                   <a:srgbClr val="1A1A1A"/>
                 </a:solidFill>
@@ -7840,18 +7753,18 @@
       </p:sp>
       <p:sp>
         <p:nvSpPr>
-          <p:cNvPr id="13" name="Rounded Rectangle 12"/>
+          <p:cNvPr id="15" name="Rounded Rectangle 14"/>
           <p:cNvSpPr/>
           <p:nvPr/>
         </p:nvSpPr>
         <p:spPr>
           <a:xfrm>
-            <a:off x="841248" y="3877056"/>
-            <a:ext cx="5715000" cy="530352"/>
+            <a:off x="841248" y="3602736"/>
+            <a:ext cx="5138928" cy="786384"/>
           </a:xfrm>
           <a:prstGeom prst="roundRect">
             <a:avLst>
-              <a:gd name="adj" fmla="val 6000"/>
+              <a:gd name="adj" fmla="val 7000"/>
             </a:avLst>
           </a:prstGeom>
           <a:solidFill>
@@ -7886,9 +7799,55 @@
           </a:p>
         </p:txBody>
       </p:sp>
+      <p:sp>
+        <p:nvSpPr>
+          <p:cNvPr id="16" name="Rounded Rectangle 15"/>
+          <p:cNvSpPr/>
+          <p:nvPr/>
+        </p:nvSpPr>
+        <p:spPr>
+          <a:xfrm>
+            <a:off x="987552" y="3739896"/>
+            <a:ext cx="512064" cy="512064"/>
+          </a:xfrm>
+          <a:prstGeom prst="roundRect">
+            <a:avLst>
+              <a:gd name="adj" fmla="val 26000"/>
+            </a:avLst>
+          </a:prstGeom>
+          <a:solidFill>
+            <a:srgbClr val="EE0000"/>
+          </a:solidFill>
+          <a:ln>
+            <a:noFill/>
+          </a:ln>
+          <a:effectLst/>
+        </p:spPr>
+        <p:style>
+          <a:lnRef idx="1">
+            <a:schemeClr val="accent1"/>
+          </a:lnRef>
+          <a:fillRef idx="3">
+            <a:schemeClr val="accent1"/>
+          </a:fillRef>
+          <a:effectRef idx="2">
+            <a:schemeClr val="accent1"/>
+          </a:effectRef>
+          <a:fontRef idx="minor">
+            <a:schemeClr val="lt1"/>
+          </a:fontRef>
+        </p:style>
+        <p:txBody>
+          <a:bodyPr rtlCol="0" anchor="ctr"/>
+          <a:lstStyle/>
+          <a:p>
+            <a:pPr algn="ctr"/>
+          </a:p>
+        </p:txBody>
+      </p:sp>
       <p:pic>
         <p:nvPicPr>
-          <p:cNvPr id="14" name="Picture 13" descr="check_steel.png"/>
+          <p:cNvPr id="17" name="Picture 16" descr="check_white.png"/>
           <p:cNvPicPr>
             <a:picLocks noChangeAspect="1"/>
           </p:cNvPicPr>
@@ -7902,8 +7861,8 @@
         </p:blipFill>
         <p:spPr>
           <a:xfrm>
-            <a:off x="987552" y="4023360"/>
-            <a:ext cx="237744" cy="237744"/>
+            <a:off x="1110447" y="3862791"/>
+            <a:ext cx="266273" cy="266273"/>
           </a:xfrm>
           <a:prstGeom prst="rect">
             <a:avLst/>
@@ -7912,14 +7871,14 @@
       </p:pic>
       <p:sp>
         <p:nvSpPr>
-          <p:cNvPr id="15" name="TextBox 14"/>
+          <p:cNvPr id="18" name="TextBox 17"/>
           <p:cNvSpPr txBox="1"/>
           <p:nvPr/>
         </p:nvSpPr>
         <p:spPr>
           <a:xfrm>
-            <a:off x="1353312" y="3877056"/>
-            <a:ext cx="5029200" cy="530352"/>
+            <a:off x="1627632" y="3602736"/>
+            <a:ext cx="4206240" cy="786384"/>
           </a:xfrm>
           <a:prstGeom prst="rect">
             <a:avLst/>
@@ -7944,7 +7903,7 @@
               </a:spcAft>
             </a:pPr>
             <a:r>
-              <a:rPr sz="1200" b="0">
+              <a:rPr sz="1150" b="0">
                 <a:solidFill>
                   <a:srgbClr val="1A1A1A"/>
                 </a:solidFill>
@@ -7957,18 +7916,18 @@
       </p:sp>
       <p:sp>
         <p:nvSpPr>
-          <p:cNvPr id="16" name="Rounded Rectangle 15"/>
+          <p:cNvPr id="19" name="Rounded Rectangle 18"/>
           <p:cNvSpPr/>
           <p:nvPr/>
         </p:nvSpPr>
         <p:spPr>
           <a:xfrm>
-            <a:off x="841248" y="4480560"/>
-            <a:ext cx="5715000" cy="530352"/>
+            <a:off x="6254496" y="3602736"/>
+            <a:ext cx="5138928" cy="786384"/>
           </a:xfrm>
           <a:prstGeom prst="roundRect">
             <a:avLst>
-              <a:gd name="adj" fmla="val 6000"/>
+              <a:gd name="adj" fmla="val 7000"/>
             </a:avLst>
           </a:prstGeom>
           <a:solidFill>
@@ -8003,9 +7962,55 @@
           </a:p>
         </p:txBody>
       </p:sp>
+      <p:sp>
+        <p:nvSpPr>
+          <p:cNvPr id="20" name="Rounded Rectangle 19"/>
+          <p:cNvSpPr/>
+          <p:nvPr/>
+        </p:nvSpPr>
+        <p:spPr>
+          <a:xfrm>
+            <a:off x="6400800" y="3739896"/>
+            <a:ext cx="512064" cy="512064"/>
+          </a:xfrm>
+          <a:prstGeom prst="roundRect">
+            <a:avLst>
+              <a:gd name="adj" fmla="val 26000"/>
+            </a:avLst>
+          </a:prstGeom>
+          <a:solidFill>
+            <a:srgbClr val="EE0000"/>
+          </a:solidFill>
+          <a:ln>
+            <a:noFill/>
+          </a:ln>
+          <a:effectLst/>
+        </p:spPr>
+        <p:style>
+          <a:lnRef idx="1">
+            <a:schemeClr val="accent1"/>
+          </a:lnRef>
+          <a:fillRef idx="3">
+            <a:schemeClr val="accent1"/>
+          </a:fillRef>
+          <a:effectRef idx="2">
+            <a:schemeClr val="accent1"/>
+          </a:effectRef>
+          <a:fontRef idx="minor">
+            <a:schemeClr val="lt1"/>
+          </a:fontRef>
+        </p:style>
+        <p:txBody>
+          <a:bodyPr rtlCol="0" anchor="ctr"/>
+          <a:lstStyle/>
+          <a:p>
+            <a:pPr algn="ctr"/>
+          </a:p>
+        </p:txBody>
+      </p:sp>
       <p:pic>
         <p:nvPicPr>
-          <p:cNvPr id="17" name="Picture 16" descr="check_steel.png"/>
+          <p:cNvPr id="21" name="Picture 20" descr="check_white.png"/>
           <p:cNvPicPr>
             <a:picLocks noChangeAspect="1"/>
           </p:cNvPicPr>
@@ -8019,8 +8024,8 @@
         </p:blipFill>
         <p:spPr>
           <a:xfrm>
-            <a:off x="987552" y="4626864"/>
-            <a:ext cx="237744" cy="237744"/>
+            <a:off x="6523695" y="3862791"/>
+            <a:ext cx="266273" cy="266273"/>
           </a:xfrm>
           <a:prstGeom prst="rect">
             <a:avLst/>
@@ -8029,14 +8034,14 @@
       </p:pic>
       <p:sp>
         <p:nvSpPr>
-          <p:cNvPr id="18" name="TextBox 17"/>
+          <p:cNvPr id="22" name="TextBox 21"/>
           <p:cNvSpPr txBox="1"/>
           <p:nvPr/>
         </p:nvSpPr>
         <p:spPr>
           <a:xfrm>
-            <a:off x="1353312" y="4480560"/>
-            <a:ext cx="5029200" cy="530352"/>
+            <a:off x="7040880" y="3602736"/>
+            <a:ext cx="4206240" cy="786384"/>
           </a:xfrm>
           <a:prstGeom prst="rect">
             <a:avLst/>
@@ -8061,7 +8066,7 @@
               </a:spcAft>
             </a:pPr>
             <a:r>
-              <a:rPr sz="1200" b="0">
+              <a:rPr sz="1150" b="0">
                 <a:solidFill>
                   <a:srgbClr val="1A1A1A"/>
                 </a:solidFill>
@@ -8074,18 +8079,18 @@
       </p:sp>
       <p:sp>
         <p:nvSpPr>
-          <p:cNvPr id="19" name="Rounded Rectangle 18"/>
+          <p:cNvPr id="23" name="Rounded Rectangle 22"/>
           <p:cNvSpPr/>
           <p:nvPr/>
         </p:nvSpPr>
         <p:spPr>
           <a:xfrm>
-            <a:off x="841248" y="5084064"/>
-            <a:ext cx="5715000" cy="530352"/>
+            <a:off x="841248" y="4535424"/>
+            <a:ext cx="5138928" cy="786384"/>
           </a:xfrm>
           <a:prstGeom prst="roundRect">
             <a:avLst>
-              <a:gd name="adj" fmla="val 6000"/>
+              <a:gd name="adj" fmla="val 7000"/>
             </a:avLst>
           </a:prstGeom>
           <a:solidFill>
@@ -8120,9 +8125,55 @@
           </a:p>
         </p:txBody>
       </p:sp>
+      <p:sp>
+        <p:nvSpPr>
+          <p:cNvPr id="24" name="Rounded Rectangle 23"/>
+          <p:cNvSpPr/>
+          <p:nvPr/>
+        </p:nvSpPr>
+        <p:spPr>
+          <a:xfrm>
+            <a:off x="987552" y="4672584"/>
+            <a:ext cx="512064" cy="512064"/>
+          </a:xfrm>
+          <a:prstGeom prst="roundRect">
+            <a:avLst>
+              <a:gd name="adj" fmla="val 26000"/>
+            </a:avLst>
+          </a:prstGeom>
+          <a:solidFill>
+            <a:srgbClr val="EE0000"/>
+          </a:solidFill>
+          <a:ln>
+            <a:noFill/>
+          </a:ln>
+          <a:effectLst/>
+        </p:spPr>
+        <p:style>
+          <a:lnRef idx="1">
+            <a:schemeClr val="accent1"/>
+          </a:lnRef>
+          <a:fillRef idx="3">
+            <a:schemeClr val="accent1"/>
+          </a:fillRef>
+          <a:effectRef idx="2">
+            <a:schemeClr val="accent1"/>
+          </a:effectRef>
+          <a:fontRef idx="minor">
+            <a:schemeClr val="lt1"/>
+          </a:fontRef>
+        </p:style>
+        <p:txBody>
+          <a:bodyPr rtlCol="0" anchor="ctr"/>
+          <a:lstStyle/>
+          <a:p>
+            <a:pPr algn="ctr"/>
+          </a:p>
+        </p:txBody>
+      </p:sp>
       <p:pic>
         <p:nvPicPr>
-          <p:cNvPr id="20" name="Picture 19" descr="check_steel.png"/>
+          <p:cNvPr id="25" name="Picture 24" descr="check_white.png"/>
           <p:cNvPicPr>
             <a:picLocks noChangeAspect="1"/>
           </p:cNvPicPr>
@@ -8136,8 +8187,8 @@
         </p:blipFill>
         <p:spPr>
           <a:xfrm>
-            <a:off x="987552" y="5230368"/>
-            <a:ext cx="237744" cy="237744"/>
+            <a:off x="1110447" y="4795479"/>
+            <a:ext cx="266273" cy="266273"/>
           </a:xfrm>
           <a:prstGeom prst="rect">
             <a:avLst/>
@@ -8146,14 +8197,14 @@
       </p:pic>
       <p:sp>
         <p:nvSpPr>
-          <p:cNvPr id="21" name="TextBox 20"/>
+          <p:cNvPr id="26" name="TextBox 25"/>
           <p:cNvSpPr txBox="1"/>
           <p:nvPr/>
         </p:nvSpPr>
         <p:spPr>
           <a:xfrm>
-            <a:off x="1353312" y="5084064"/>
-            <a:ext cx="5029200" cy="530352"/>
+            <a:off x="1627632" y="4535424"/>
+            <a:ext cx="4206240" cy="786384"/>
           </a:xfrm>
           <a:prstGeom prst="rect">
             <a:avLst/>
@@ -8178,221 +8229,13 @@
               </a:spcAft>
             </a:pPr>
             <a:r>
-              <a:rPr sz="1200" b="0">
+              <a:rPr sz="1150" b="0">
                 <a:solidFill>
                   <a:srgbClr val="1A1A1A"/>
                 </a:solidFill>
                 <a:latin typeface="Red Hat Text"/>
               </a:rPr>
               <a:t>ICSP is the deprecated predecessor (migrate to IDMS)</a:t>
-            </a:r>
-          </a:p>
-        </p:txBody>
-      </p:sp>
-      <p:sp>
-        <p:nvSpPr>
-          <p:cNvPr id="22" name="Rounded Rectangle 21"/>
-          <p:cNvSpPr/>
-          <p:nvPr/>
-        </p:nvSpPr>
-        <p:spPr>
-          <a:xfrm>
-            <a:off x="6812280" y="2670048"/>
-            <a:ext cx="4538167" cy="2944368"/>
-          </a:xfrm>
-          <a:prstGeom prst="roundRect">
-            <a:avLst>
-              <a:gd name="adj" fmla="val 4000"/>
-            </a:avLst>
-          </a:prstGeom>
-          <a:solidFill>
-            <a:srgbClr val="FFFFFF"/>
-          </a:solidFill>
-          <a:ln w="15240">
-            <a:solidFill>
-              <a:srgbClr val="DDE1E6"/>
-            </a:solidFill>
-          </a:ln>
-          <a:effectLst/>
-        </p:spPr>
-        <p:style>
-          <a:lnRef idx="1">
-            <a:schemeClr val="accent1"/>
-          </a:lnRef>
-          <a:fillRef idx="3">
-            <a:schemeClr val="accent1"/>
-          </a:fillRef>
-          <a:effectRef idx="2">
-            <a:schemeClr val="accent1"/>
-          </a:effectRef>
-          <a:fontRef idx="minor">
-            <a:schemeClr val="lt1"/>
-          </a:fontRef>
-        </p:style>
-        <p:txBody>
-          <a:bodyPr rtlCol="0" anchor="ctr"/>
-          <a:lstStyle/>
-          <a:p>
-            <a:pPr algn="ctr"/>
-          </a:p>
-        </p:txBody>
-      </p:sp>
-      <p:sp>
-        <p:nvSpPr>
-          <p:cNvPr id="23" name="Rounded Rectangle 22"/>
-          <p:cNvSpPr/>
-          <p:nvPr/>
-        </p:nvSpPr>
-        <p:spPr>
-          <a:xfrm>
-            <a:off x="7013448" y="2871216"/>
-            <a:ext cx="1298448" cy="310896"/>
-          </a:xfrm>
-          <a:prstGeom prst="roundRect">
-            <a:avLst>
-              <a:gd name="adj" fmla="val 50000"/>
-            </a:avLst>
-          </a:prstGeom>
-          <a:solidFill>
-            <a:srgbClr val="FCECEC"/>
-          </a:solidFill>
-          <a:ln>
-            <a:noFill/>
-          </a:ln>
-          <a:effectLst/>
-        </p:spPr>
-        <p:style>
-          <a:lnRef idx="1">
-            <a:schemeClr val="accent1"/>
-          </a:lnRef>
-          <a:fillRef idx="3">
-            <a:schemeClr val="accent1"/>
-          </a:fillRef>
-          <a:effectRef idx="2">
-            <a:schemeClr val="accent1"/>
-          </a:effectRef>
-          <a:fontRef idx="minor">
-            <a:schemeClr val="lt1"/>
-          </a:fontRef>
-        </p:style>
-        <p:txBody>
-          <a:bodyPr rtlCol="0" anchor="ctr"/>
-          <a:lstStyle/>
-          <a:p>
-            <a:pPr algn="ctr"/>
-          </a:p>
-        </p:txBody>
-      </p:sp>
-      <p:sp>
-        <p:nvSpPr>
-          <p:cNvPr id="24" name="TextBox 23"/>
-          <p:cNvSpPr txBox="1"/>
-          <p:nvPr/>
-        </p:nvSpPr>
-        <p:spPr>
-          <a:xfrm>
-            <a:off x="7013448" y="2871216"/>
-            <a:ext cx="1298448" cy="310896"/>
-          </a:xfrm>
-          <a:prstGeom prst="rect">
-            <a:avLst/>
-          </a:prstGeom>
-          <a:noFill/>
-        </p:spPr>
-        <p:txBody>
-          <a:bodyPr wrap="none" anchor="ctr" lIns="0" rIns="0" tIns="0" bIns="0">
-            <a:spAutoFit/>
-          </a:bodyPr>
-          <a:lstStyle/>
-          <a:p>
-            <a:pPr algn="ctr">
-              <a:lnSpc>
-                <a:spcPct val="106000"/>
-              </a:lnSpc>
-              <a:spcBef>
-                <a:spcPts val="0"/>
-              </a:spcBef>
-              <a:spcAft>
-                <a:spcPts val="0"/>
-              </a:spcAft>
-            </a:pPr>
-            <a:r>
-              <a:rPr sz="850" b="1">
-                <a:solidFill>
-                  <a:srgbClr val="B80000"/>
-                </a:solidFill>
-                <a:latin typeface="Red Hat Display"/>
-              </a:rPr>
-              <a:t>MEDIA PASS</a:t>
-            </a:r>
-          </a:p>
-        </p:txBody>
-      </p:sp>
-      <p:pic>
-        <p:nvPicPr>
-          <p:cNvPr id="25" name="Picture 24" descr="eye_slate.png"/>
-          <p:cNvPicPr>
-            <a:picLocks noChangeAspect="1"/>
-          </p:cNvPicPr>
-          <p:nvPr/>
-        </p:nvPicPr>
-        <p:blipFill>
-          <a:blip r:embed="rId4"/>
-          <a:stretch>
-            <a:fillRect/>
-          </a:stretch>
-        </p:blipFill>
-        <p:spPr>
-          <a:xfrm>
-            <a:off x="8843619" y="3383280"/>
-            <a:ext cx="475488" cy="475488"/>
-          </a:xfrm>
-          <a:prstGeom prst="rect">
-            <a:avLst/>
-          </a:prstGeom>
-        </p:spPr>
-      </p:pic>
-      <p:sp>
-        <p:nvSpPr>
-          <p:cNvPr id="26" name="TextBox 25"/>
-          <p:cNvSpPr txBox="1"/>
-          <p:nvPr/>
-        </p:nvSpPr>
-        <p:spPr>
-          <a:xfrm>
-            <a:off x="7050024" y="3995928"/>
-            <a:ext cx="4062679" cy="1481328"/>
-          </a:xfrm>
-          <a:prstGeom prst="rect">
-            <a:avLst/>
-          </a:prstGeom>
-          <a:noFill/>
-        </p:spPr>
-        <p:txBody>
-          <a:bodyPr wrap="square" anchor="t" lIns="0" rIns="0" tIns="0" bIns="0">
-            <a:spAutoFit/>
-          </a:bodyPr>
-          <a:lstStyle/>
-          <a:p>
-            <a:pPr algn="l">
-              <a:lnSpc>
-                <a:spcPct val="120000"/>
-              </a:lnSpc>
-              <a:spcBef>
-                <a:spcPts val="0"/>
-              </a:spcBef>
-              <a:spcAft>
-                <a:spcPts val="0"/>
-              </a:spcAft>
-            </a:pPr>
-            <a:r>
-              <a:rPr sz="950" b="0">
-                <a:solidFill>
-                  <a:srgbClr val="8A9099"/>
-                </a:solidFill>
-                <a:latin typeface="Red Hat Text"/>
-              </a:rPr>
-              <a:t>A three-tier "blast radius" ladder — allowedRegistriesForImport (instant, green) → registrySources (node reboot, amber) → IDMS/ITMS (every node, disconnected, red) — with a side arrow to Trusted Software Supply Chain "signatures = the other axis."</a:t>
             </a:r>
           </a:p>
         </p:txBody>
@@ -8745,11 +8588,11 @@
         <p:spPr>
           <a:xfrm>
             <a:off x="841248" y="2670048"/>
-            <a:ext cx="5715000" cy="530352"/>
+            <a:ext cx="5138928" cy="786384"/>
           </a:xfrm>
           <a:prstGeom prst="roundRect">
             <a:avLst>
-              <a:gd name="adj" fmla="val 6000"/>
+              <a:gd name="adj" fmla="val 7000"/>
             </a:avLst>
           </a:prstGeom>
           <a:solidFill>
@@ -8784,9 +8627,55 @@
           </a:p>
         </p:txBody>
       </p:sp>
+      <p:sp>
+        <p:nvSpPr>
+          <p:cNvPr id="8" name="Rounded Rectangle 7"/>
+          <p:cNvSpPr/>
+          <p:nvPr/>
+        </p:nvSpPr>
+        <p:spPr>
+          <a:xfrm>
+            <a:off x="987552" y="2807208"/>
+            <a:ext cx="512064" cy="512064"/>
+          </a:xfrm>
+          <a:prstGeom prst="roundRect">
+            <a:avLst>
+              <a:gd name="adj" fmla="val 26000"/>
+            </a:avLst>
+          </a:prstGeom>
+          <a:solidFill>
+            <a:srgbClr val="EE0000"/>
+          </a:solidFill>
+          <a:ln>
+            <a:noFill/>
+          </a:ln>
+          <a:effectLst/>
+        </p:spPr>
+        <p:style>
+          <a:lnRef idx="1">
+            <a:schemeClr val="accent1"/>
+          </a:lnRef>
+          <a:fillRef idx="3">
+            <a:schemeClr val="accent1"/>
+          </a:fillRef>
+          <a:effectRef idx="2">
+            <a:schemeClr val="accent1"/>
+          </a:effectRef>
+          <a:fontRef idx="minor">
+            <a:schemeClr val="lt1"/>
+          </a:fontRef>
+        </p:style>
+        <p:txBody>
+          <a:bodyPr rtlCol="0" anchor="ctr"/>
+          <a:lstStyle/>
+          <a:p>
+            <a:pPr algn="ctr"/>
+          </a:p>
+        </p:txBody>
+      </p:sp>
       <p:pic>
         <p:nvPicPr>
-          <p:cNvPr id="8" name="Picture 7" descr="check_steel.png"/>
+          <p:cNvPr id="9" name="Picture 8" descr="check_white.png"/>
           <p:cNvPicPr>
             <a:picLocks noChangeAspect="1"/>
           </p:cNvPicPr>
@@ -8800,8 +8689,8 @@
         </p:blipFill>
         <p:spPr>
           <a:xfrm>
-            <a:off x="987552" y="2816352"/>
-            <a:ext cx="237744" cy="237744"/>
+            <a:off x="1110447" y="2930103"/>
+            <a:ext cx="266273" cy="266273"/>
           </a:xfrm>
           <a:prstGeom prst="rect">
             <a:avLst/>
@@ -8810,14 +8699,14 @@
       </p:pic>
       <p:sp>
         <p:nvSpPr>
-          <p:cNvPr id="9" name="TextBox 8"/>
+          <p:cNvPr id="10" name="TextBox 9"/>
           <p:cNvSpPr txBox="1"/>
           <p:nvPr/>
         </p:nvSpPr>
         <p:spPr>
           <a:xfrm>
-            <a:off x="1353312" y="2670048"/>
-            <a:ext cx="5029200" cy="530352"/>
+            <a:off x="1627632" y="2670048"/>
+            <a:ext cx="4206240" cy="786384"/>
           </a:xfrm>
           <a:prstGeom prst="rect">
             <a:avLst/>
@@ -8842,7 +8731,7 @@
               </a:spcAft>
             </a:pPr>
             <a:r>
-              <a:rPr sz="1200" b="0">
+              <a:rPr sz="1150" b="0">
                 <a:solidFill>
                   <a:srgbClr val="1A1A1A"/>
                 </a:solidFill>
@@ -8855,18 +8744,18 @@
       </p:sp>
       <p:sp>
         <p:nvSpPr>
-          <p:cNvPr id="10" name="Rounded Rectangle 9"/>
+          <p:cNvPr id="11" name="Rounded Rectangle 10"/>
           <p:cNvSpPr/>
           <p:nvPr/>
         </p:nvSpPr>
         <p:spPr>
           <a:xfrm>
-            <a:off x="841248" y="3273552"/>
-            <a:ext cx="5715000" cy="530352"/>
+            <a:off x="6254496" y="2670048"/>
+            <a:ext cx="5138928" cy="786384"/>
           </a:xfrm>
           <a:prstGeom prst="roundRect">
             <a:avLst>
-              <a:gd name="adj" fmla="val 6000"/>
+              <a:gd name="adj" fmla="val 7000"/>
             </a:avLst>
           </a:prstGeom>
           <a:solidFill>
@@ -8901,9 +8790,55 @@
           </a:p>
         </p:txBody>
       </p:sp>
+      <p:sp>
+        <p:nvSpPr>
+          <p:cNvPr id="12" name="Rounded Rectangle 11"/>
+          <p:cNvSpPr/>
+          <p:nvPr/>
+        </p:nvSpPr>
+        <p:spPr>
+          <a:xfrm>
+            <a:off x="6400800" y="2807208"/>
+            <a:ext cx="512064" cy="512064"/>
+          </a:xfrm>
+          <a:prstGeom prst="roundRect">
+            <a:avLst>
+              <a:gd name="adj" fmla="val 26000"/>
+            </a:avLst>
+          </a:prstGeom>
+          <a:solidFill>
+            <a:srgbClr val="EE0000"/>
+          </a:solidFill>
+          <a:ln>
+            <a:noFill/>
+          </a:ln>
+          <a:effectLst/>
+        </p:spPr>
+        <p:style>
+          <a:lnRef idx="1">
+            <a:schemeClr val="accent1"/>
+          </a:lnRef>
+          <a:fillRef idx="3">
+            <a:schemeClr val="accent1"/>
+          </a:fillRef>
+          <a:effectRef idx="2">
+            <a:schemeClr val="accent1"/>
+          </a:effectRef>
+          <a:fontRef idx="minor">
+            <a:schemeClr val="lt1"/>
+          </a:fontRef>
+        </p:style>
+        <p:txBody>
+          <a:bodyPr rtlCol="0" anchor="ctr"/>
+          <a:lstStyle/>
+          <a:p>
+            <a:pPr algn="ctr"/>
+          </a:p>
+        </p:txBody>
+      </p:sp>
       <p:pic>
         <p:nvPicPr>
-          <p:cNvPr id="11" name="Picture 10" descr="check_steel.png"/>
+          <p:cNvPr id="13" name="Picture 12" descr="check_white.png"/>
           <p:cNvPicPr>
             <a:picLocks noChangeAspect="1"/>
           </p:cNvPicPr>
@@ -8917,8 +8852,8 @@
         </p:blipFill>
         <p:spPr>
           <a:xfrm>
-            <a:off x="987552" y="3419856"/>
-            <a:ext cx="237744" cy="237744"/>
+            <a:off x="6523695" y="2930103"/>
+            <a:ext cx="266273" cy="266273"/>
           </a:xfrm>
           <a:prstGeom prst="rect">
             <a:avLst/>
@@ -8927,14 +8862,14 @@
       </p:pic>
       <p:sp>
         <p:nvSpPr>
-          <p:cNvPr id="12" name="TextBox 11"/>
+          <p:cNvPr id="14" name="TextBox 13"/>
           <p:cNvSpPr txBox="1"/>
           <p:nvPr/>
         </p:nvSpPr>
         <p:spPr>
           <a:xfrm>
-            <a:off x="1353312" y="3273552"/>
-            <a:ext cx="5029200" cy="530352"/>
+            <a:off x="7040880" y="2670048"/>
+            <a:ext cx="4206240" cy="786384"/>
           </a:xfrm>
           <a:prstGeom prst="rect">
             <a:avLst/>
@@ -8959,7 +8894,7 @@
               </a:spcAft>
             </a:pPr>
             <a:r>
-              <a:rPr sz="1200" b="0">
+              <a:rPr sz="1150" b="0">
                 <a:solidFill>
                   <a:srgbClr val="1A1A1A"/>
                 </a:solidFill>
@@ -8972,18 +8907,18 @@
       </p:sp>
       <p:sp>
         <p:nvSpPr>
-          <p:cNvPr id="13" name="Rounded Rectangle 12"/>
+          <p:cNvPr id="15" name="Rounded Rectangle 14"/>
           <p:cNvSpPr/>
           <p:nvPr/>
         </p:nvSpPr>
         <p:spPr>
           <a:xfrm>
-            <a:off x="841248" y="3877056"/>
-            <a:ext cx="5715000" cy="530352"/>
+            <a:off x="841248" y="3602736"/>
+            <a:ext cx="5138928" cy="786384"/>
           </a:xfrm>
           <a:prstGeom prst="roundRect">
             <a:avLst>
-              <a:gd name="adj" fmla="val 6000"/>
+              <a:gd name="adj" fmla="val 7000"/>
             </a:avLst>
           </a:prstGeom>
           <a:solidFill>
@@ -9018,9 +8953,55 @@
           </a:p>
         </p:txBody>
       </p:sp>
+      <p:sp>
+        <p:nvSpPr>
+          <p:cNvPr id="16" name="Rounded Rectangle 15"/>
+          <p:cNvSpPr/>
+          <p:nvPr/>
+        </p:nvSpPr>
+        <p:spPr>
+          <a:xfrm>
+            <a:off x="987552" y="3739896"/>
+            <a:ext cx="512064" cy="512064"/>
+          </a:xfrm>
+          <a:prstGeom prst="roundRect">
+            <a:avLst>
+              <a:gd name="adj" fmla="val 26000"/>
+            </a:avLst>
+          </a:prstGeom>
+          <a:solidFill>
+            <a:srgbClr val="EE0000"/>
+          </a:solidFill>
+          <a:ln>
+            <a:noFill/>
+          </a:ln>
+          <a:effectLst/>
+        </p:spPr>
+        <p:style>
+          <a:lnRef idx="1">
+            <a:schemeClr val="accent1"/>
+          </a:lnRef>
+          <a:fillRef idx="3">
+            <a:schemeClr val="accent1"/>
+          </a:fillRef>
+          <a:effectRef idx="2">
+            <a:schemeClr val="accent1"/>
+          </a:effectRef>
+          <a:fontRef idx="minor">
+            <a:schemeClr val="lt1"/>
+          </a:fontRef>
+        </p:style>
+        <p:txBody>
+          <a:bodyPr rtlCol="0" anchor="ctr"/>
+          <a:lstStyle/>
+          <a:p>
+            <a:pPr algn="ctr"/>
+          </a:p>
+        </p:txBody>
+      </p:sp>
       <p:pic>
         <p:nvPicPr>
-          <p:cNvPr id="14" name="Picture 13" descr="check_steel.png"/>
+          <p:cNvPr id="17" name="Picture 16" descr="check_white.png"/>
           <p:cNvPicPr>
             <a:picLocks noChangeAspect="1"/>
           </p:cNvPicPr>
@@ -9034,8 +9015,8 @@
         </p:blipFill>
         <p:spPr>
           <a:xfrm>
-            <a:off x="987552" y="4023360"/>
-            <a:ext cx="237744" cy="237744"/>
+            <a:off x="1110447" y="3862791"/>
+            <a:ext cx="266273" cy="266273"/>
           </a:xfrm>
           <a:prstGeom prst="rect">
             <a:avLst/>
@@ -9044,14 +9025,14 @@
       </p:pic>
       <p:sp>
         <p:nvSpPr>
-          <p:cNvPr id="15" name="TextBox 14"/>
+          <p:cNvPr id="18" name="TextBox 17"/>
           <p:cNvSpPr txBox="1"/>
           <p:nvPr/>
         </p:nvSpPr>
         <p:spPr>
           <a:xfrm>
-            <a:off x="1353312" y="3877056"/>
-            <a:ext cx="5029200" cy="530352"/>
+            <a:off x="1627632" y="3602736"/>
+            <a:ext cx="4206240" cy="786384"/>
           </a:xfrm>
           <a:prstGeom prst="rect">
             <a:avLst/>
@@ -9076,7 +9057,7 @@
               </a:spcAft>
             </a:pPr>
             <a:r>
-              <a:rPr sz="1200" b="0">
+              <a:rPr sz="1150" b="0">
                 <a:solidFill>
                   <a:srgbClr val="1A1A1A"/>
                 </a:solidFill>
@@ -9089,18 +9070,18 @@
       </p:sp>
       <p:sp>
         <p:nvSpPr>
-          <p:cNvPr id="16" name="Rounded Rectangle 15"/>
+          <p:cNvPr id="19" name="Rounded Rectangle 18"/>
           <p:cNvSpPr/>
           <p:nvPr/>
         </p:nvSpPr>
         <p:spPr>
           <a:xfrm>
-            <a:off x="841248" y="4480560"/>
-            <a:ext cx="5715000" cy="530352"/>
+            <a:off x="6254496" y="3602736"/>
+            <a:ext cx="5138928" cy="786384"/>
           </a:xfrm>
           <a:prstGeom prst="roundRect">
             <a:avLst>
-              <a:gd name="adj" fmla="val 6000"/>
+              <a:gd name="adj" fmla="val 7000"/>
             </a:avLst>
           </a:prstGeom>
           <a:solidFill>
@@ -9135,9 +9116,55 @@
           </a:p>
         </p:txBody>
       </p:sp>
+      <p:sp>
+        <p:nvSpPr>
+          <p:cNvPr id="20" name="Rounded Rectangle 19"/>
+          <p:cNvSpPr/>
+          <p:nvPr/>
+        </p:nvSpPr>
+        <p:spPr>
+          <a:xfrm>
+            <a:off x="6400800" y="3739896"/>
+            <a:ext cx="512064" cy="512064"/>
+          </a:xfrm>
+          <a:prstGeom prst="roundRect">
+            <a:avLst>
+              <a:gd name="adj" fmla="val 26000"/>
+            </a:avLst>
+          </a:prstGeom>
+          <a:solidFill>
+            <a:srgbClr val="EE0000"/>
+          </a:solidFill>
+          <a:ln>
+            <a:noFill/>
+          </a:ln>
+          <a:effectLst/>
+        </p:spPr>
+        <p:style>
+          <a:lnRef idx="1">
+            <a:schemeClr val="accent1"/>
+          </a:lnRef>
+          <a:fillRef idx="3">
+            <a:schemeClr val="accent1"/>
+          </a:fillRef>
+          <a:effectRef idx="2">
+            <a:schemeClr val="accent1"/>
+          </a:effectRef>
+          <a:fontRef idx="minor">
+            <a:schemeClr val="lt1"/>
+          </a:fontRef>
+        </p:style>
+        <p:txBody>
+          <a:bodyPr rtlCol="0" anchor="ctr"/>
+          <a:lstStyle/>
+          <a:p>
+            <a:pPr algn="ctr"/>
+          </a:p>
+        </p:txBody>
+      </p:sp>
       <p:pic>
         <p:nvPicPr>
-          <p:cNvPr id="17" name="Picture 16" descr="check_steel.png"/>
+          <p:cNvPr id="21" name="Picture 20" descr="check_white.png"/>
           <p:cNvPicPr>
             <a:picLocks noChangeAspect="1"/>
           </p:cNvPicPr>
@@ -9151,8 +9178,8 @@
         </p:blipFill>
         <p:spPr>
           <a:xfrm>
-            <a:off x="987552" y="4626864"/>
-            <a:ext cx="237744" cy="237744"/>
+            <a:off x="6523695" y="3862791"/>
+            <a:ext cx="266273" cy="266273"/>
           </a:xfrm>
           <a:prstGeom prst="rect">
             <a:avLst/>
@@ -9161,14 +9188,14 @@
       </p:pic>
       <p:sp>
         <p:nvSpPr>
-          <p:cNvPr id="18" name="TextBox 17"/>
+          <p:cNvPr id="22" name="TextBox 21"/>
           <p:cNvSpPr txBox="1"/>
           <p:nvPr/>
         </p:nvSpPr>
         <p:spPr>
           <a:xfrm>
-            <a:off x="1353312" y="4480560"/>
-            <a:ext cx="5029200" cy="530352"/>
+            <a:off x="7040880" y="3602736"/>
+            <a:ext cx="4206240" cy="786384"/>
           </a:xfrm>
           <a:prstGeom prst="rect">
             <a:avLst/>
@@ -9193,7 +9220,7 @@
               </a:spcAft>
             </a:pPr>
             <a:r>
-              <a:rPr sz="1200" b="0">
+              <a:rPr sz="1150" b="0">
                 <a:solidFill>
                   <a:srgbClr val="1A1A1A"/>
                 </a:solidFill>
@@ -9206,18 +9233,18 @@
       </p:sp>
       <p:sp>
         <p:nvSpPr>
-          <p:cNvPr id="19" name="Rounded Rectangle 18"/>
+          <p:cNvPr id="23" name="Rounded Rectangle 22"/>
           <p:cNvSpPr/>
           <p:nvPr/>
         </p:nvSpPr>
         <p:spPr>
           <a:xfrm>
-            <a:off x="841248" y="5084064"/>
-            <a:ext cx="5715000" cy="530352"/>
+            <a:off x="841248" y="4535424"/>
+            <a:ext cx="5138928" cy="786384"/>
           </a:xfrm>
           <a:prstGeom prst="roundRect">
             <a:avLst>
-              <a:gd name="adj" fmla="val 6000"/>
+              <a:gd name="adj" fmla="val 7000"/>
             </a:avLst>
           </a:prstGeom>
           <a:solidFill>
@@ -9252,9 +9279,55 @@
           </a:p>
         </p:txBody>
       </p:sp>
+      <p:sp>
+        <p:nvSpPr>
+          <p:cNvPr id="24" name="Rounded Rectangle 23"/>
+          <p:cNvSpPr/>
+          <p:nvPr/>
+        </p:nvSpPr>
+        <p:spPr>
+          <a:xfrm>
+            <a:off x="987552" y="4672584"/>
+            <a:ext cx="512064" cy="512064"/>
+          </a:xfrm>
+          <a:prstGeom prst="roundRect">
+            <a:avLst>
+              <a:gd name="adj" fmla="val 26000"/>
+            </a:avLst>
+          </a:prstGeom>
+          <a:solidFill>
+            <a:srgbClr val="EE0000"/>
+          </a:solidFill>
+          <a:ln>
+            <a:noFill/>
+          </a:ln>
+          <a:effectLst/>
+        </p:spPr>
+        <p:style>
+          <a:lnRef idx="1">
+            <a:schemeClr val="accent1"/>
+          </a:lnRef>
+          <a:fillRef idx="3">
+            <a:schemeClr val="accent1"/>
+          </a:fillRef>
+          <a:effectRef idx="2">
+            <a:schemeClr val="accent1"/>
+          </a:effectRef>
+          <a:fontRef idx="minor">
+            <a:schemeClr val="lt1"/>
+          </a:fontRef>
+        </p:style>
+        <p:txBody>
+          <a:bodyPr rtlCol="0" anchor="ctr"/>
+          <a:lstStyle/>
+          <a:p>
+            <a:pPr algn="ctr"/>
+          </a:p>
+        </p:txBody>
+      </p:sp>
       <p:pic>
         <p:nvPicPr>
-          <p:cNvPr id="20" name="Picture 19" descr="check_steel.png"/>
+          <p:cNvPr id="25" name="Picture 24" descr="check_white.png"/>
           <p:cNvPicPr>
             <a:picLocks noChangeAspect="1"/>
           </p:cNvPicPr>
@@ -9268,8 +9341,8 @@
         </p:blipFill>
         <p:spPr>
           <a:xfrm>
-            <a:off x="987552" y="5230368"/>
-            <a:ext cx="237744" cy="237744"/>
+            <a:off x="1110447" y="4795479"/>
+            <a:ext cx="266273" cy="266273"/>
           </a:xfrm>
           <a:prstGeom prst="rect">
             <a:avLst/>
@@ -9278,14 +9351,14 @@
       </p:pic>
       <p:sp>
         <p:nvSpPr>
-          <p:cNvPr id="21" name="TextBox 20"/>
+          <p:cNvPr id="26" name="TextBox 25"/>
           <p:cNvSpPr txBox="1"/>
           <p:nvPr/>
         </p:nvSpPr>
         <p:spPr>
           <a:xfrm>
-            <a:off x="1353312" y="5084064"/>
-            <a:ext cx="5029200" cy="530352"/>
+            <a:off x="1627632" y="4535424"/>
+            <a:ext cx="4206240" cy="786384"/>
           </a:xfrm>
           <a:prstGeom prst="rect">
             <a:avLst/>
@@ -9310,221 +9383,13 @@
               </a:spcAft>
             </a:pPr>
             <a:r>
-              <a:rPr sz="1200" b="0">
+              <a:rPr sz="1150" b="0">
                 <a:solidFill>
                   <a:srgbClr val="1A1A1A"/>
                 </a:solidFill>
                 <a:latin typeface="Red Hat Text"/>
               </a:rPr>
               <a:t>Devfiles: community + private (Dev Spaces, Dev Spaces &amp; the Inner Loop)</a:t>
-            </a:r>
-          </a:p>
-        </p:txBody>
-      </p:sp>
-      <p:sp>
-        <p:nvSpPr>
-          <p:cNvPr id="22" name="Rounded Rectangle 21"/>
-          <p:cNvSpPr/>
-          <p:nvPr/>
-        </p:nvSpPr>
-        <p:spPr>
-          <a:xfrm>
-            <a:off x="6812280" y="2670048"/>
-            <a:ext cx="4538167" cy="2944368"/>
-          </a:xfrm>
-          <a:prstGeom prst="roundRect">
-            <a:avLst>
-              <a:gd name="adj" fmla="val 4000"/>
-            </a:avLst>
-          </a:prstGeom>
-          <a:solidFill>
-            <a:srgbClr val="FFFFFF"/>
-          </a:solidFill>
-          <a:ln w="15240">
-            <a:solidFill>
-              <a:srgbClr val="DDE1E6"/>
-            </a:solidFill>
-          </a:ln>
-          <a:effectLst/>
-        </p:spPr>
-        <p:style>
-          <a:lnRef idx="1">
-            <a:schemeClr val="accent1"/>
-          </a:lnRef>
-          <a:fillRef idx="3">
-            <a:schemeClr val="accent1"/>
-          </a:fillRef>
-          <a:effectRef idx="2">
-            <a:schemeClr val="accent1"/>
-          </a:effectRef>
-          <a:fontRef idx="minor">
-            <a:schemeClr val="lt1"/>
-          </a:fontRef>
-        </p:style>
-        <p:txBody>
-          <a:bodyPr rtlCol="0" anchor="ctr"/>
-          <a:lstStyle/>
-          <a:p>
-            <a:pPr algn="ctr"/>
-          </a:p>
-        </p:txBody>
-      </p:sp>
-      <p:sp>
-        <p:nvSpPr>
-          <p:cNvPr id="23" name="Rounded Rectangle 22"/>
-          <p:cNvSpPr/>
-          <p:nvPr/>
-        </p:nvSpPr>
-        <p:spPr>
-          <a:xfrm>
-            <a:off x="7013448" y="2871216"/>
-            <a:ext cx="1298448" cy="310896"/>
-          </a:xfrm>
-          <a:prstGeom prst="roundRect">
-            <a:avLst>
-              <a:gd name="adj" fmla="val 50000"/>
-            </a:avLst>
-          </a:prstGeom>
-          <a:solidFill>
-            <a:srgbClr val="FCECEC"/>
-          </a:solidFill>
-          <a:ln>
-            <a:noFill/>
-          </a:ln>
-          <a:effectLst/>
-        </p:spPr>
-        <p:style>
-          <a:lnRef idx="1">
-            <a:schemeClr val="accent1"/>
-          </a:lnRef>
-          <a:fillRef idx="3">
-            <a:schemeClr val="accent1"/>
-          </a:fillRef>
-          <a:effectRef idx="2">
-            <a:schemeClr val="accent1"/>
-          </a:effectRef>
-          <a:fontRef idx="minor">
-            <a:schemeClr val="lt1"/>
-          </a:fontRef>
-        </p:style>
-        <p:txBody>
-          <a:bodyPr rtlCol="0" anchor="ctr"/>
-          <a:lstStyle/>
-          <a:p>
-            <a:pPr algn="ctr"/>
-          </a:p>
-        </p:txBody>
-      </p:sp>
-      <p:sp>
-        <p:nvSpPr>
-          <p:cNvPr id="24" name="TextBox 23"/>
-          <p:cNvSpPr txBox="1"/>
-          <p:nvPr/>
-        </p:nvSpPr>
-        <p:spPr>
-          <a:xfrm>
-            <a:off x="7013448" y="2871216"/>
-            <a:ext cx="1298448" cy="310896"/>
-          </a:xfrm>
-          <a:prstGeom prst="rect">
-            <a:avLst/>
-          </a:prstGeom>
-          <a:noFill/>
-        </p:spPr>
-        <p:txBody>
-          <a:bodyPr wrap="none" anchor="ctr" lIns="0" rIns="0" tIns="0" bIns="0">
-            <a:spAutoFit/>
-          </a:bodyPr>
-          <a:lstStyle/>
-          <a:p>
-            <a:pPr algn="ctr">
-              <a:lnSpc>
-                <a:spcPct val="106000"/>
-              </a:lnSpc>
-              <a:spcBef>
-                <a:spcPts val="0"/>
-              </a:spcBef>
-              <a:spcAft>
-                <a:spcPts val="0"/>
-              </a:spcAft>
-            </a:pPr>
-            <a:r>
-              <a:rPr sz="850" b="1">
-                <a:solidFill>
-                  <a:srgbClr val="B80000"/>
-                </a:solidFill>
-                <a:latin typeface="Red Hat Display"/>
-              </a:rPr>
-              <a:t>MEDIA PASS</a:t>
-            </a:r>
-          </a:p>
-        </p:txBody>
-      </p:sp>
-      <p:pic>
-        <p:nvPicPr>
-          <p:cNvPr id="25" name="Picture 24" descr="eye_slate.png"/>
-          <p:cNvPicPr>
-            <a:picLocks noChangeAspect="1"/>
-          </p:cNvPicPr>
-          <p:nvPr/>
-        </p:nvPicPr>
-        <p:blipFill>
-          <a:blip r:embed="rId4"/>
-          <a:stretch>
-            <a:fillRect/>
-          </a:stretch>
-        </p:blipFill>
-        <p:spPr>
-          <a:xfrm>
-            <a:off x="8843619" y="3383280"/>
-            <a:ext cx="475488" cy="475488"/>
-          </a:xfrm>
-          <a:prstGeom prst="rect">
-            <a:avLst/>
-          </a:prstGeom>
-        </p:spPr>
-      </p:pic>
-      <p:sp>
-        <p:nvSpPr>
-          <p:cNvPr id="26" name="TextBox 25"/>
-          <p:cNvSpPr txBox="1"/>
-          <p:nvPr/>
-        </p:nvSpPr>
-        <p:spPr>
-          <a:xfrm>
-            <a:off x="7050024" y="3995928"/>
-            <a:ext cx="4062679" cy="1481328"/>
-          </a:xfrm>
-          <a:prstGeom prst="rect">
-            <a:avLst/>
-          </a:prstGeom>
-          <a:noFill/>
-        </p:spPr>
-        <p:txBody>
-          <a:bodyPr wrap="square" anchor="t" lIns="0" rIns="0" tIns="0" bIns="0">
-            <a:spAutoFit/>
-          </a:bodyPr>
-          <a:lstStyle/>
-          <a:p>
-            <a:pPr algn="l">
-              <a:lnSpc>
-                <a:spcPct val="120000"/>
-              </a:lnSpc>
-              <a:spcBef>
-                <a:spcPts val="0"/>
-              </a:spcBef>
-              <a:spcAft>
-                <a:spcPts val="0"/>
-              </a:spcAft>
-            </a:pPr>
-            <a:r>
-              <a:rPr sz="950" b="0">
-                <a:solidFill>
-                  <a:srgbClr val="8A9099"/>
-                </a:solidFill>
-                <a:latin typeface="Red Hat Text"/>
-              </a:rPr>
-              <a:t>A catalog "feed" diagram — five inputs (OperatorHub sources, samples operator, ConsoleSample, namespaced Template, devfiles) flowing into one Developer Catalog tile grid; the namespaced Template input tagged "your project only."</a:t>
             </a:r>
           </a:p>
         </p:txBody>
@@ -9877,11 +9742,11 @@
         <p:spPr>
           <a:xfrm>
             <a:off x="841248" y="2670048"/>
-            <a:ext cx="5715000" cy="530352"/>
+            <a:ext cx="5138928" cy="786384"/>
           </a:xfrm>
           <a:prstGeom prst="roundRect">
             <a:avLst>
-              <a:gd name="adj" fmla="val 6000"/>
+              <a:gd name="adj" fmla="val 7000"/>
             </a:avLst>
           </a:prstGeom>
           <a:solidFill>
@@ -9916,9 +9781,55 @@
           </a:p>
         </p:txBody>
       </p:sp>
+      <p:sp>
+        <p:nvSpPr>
+          <p:cNvPr id="8" name="Rounded Rectangle 7"/>
+          <p:cNvSpPr/>
+          <p:nvPr/>
+        </p:nvSpPr>
+        <p:spPr>
+          <a:xfrm>
+            <a:off x="987552" y="2807208"/>
+            <a:ext cx="512064" cy="512064"/>
+          </a:xfrm>
+          <a:prstGeom prst="roundRect">
+            <a:avLst>
+              <a:gd name="adj" fmla="val 26000"/>
+            </a:avLst>
+          </a:prstGeom>
+          <a:solidFill>
+            <a:srgbClr val="EE0000"/>
+          </a:solidFill>
+          <a:ln>
+            <a:noFill/>
+          </a:ln>
+          <a:effectLst/>
+        </p:spPr>
+        <p:style>
+          <a:lnRef idx="1">
+            <a:schemeClr val="accent1"/>
+          </a:lnRef>
+          <a:fillRef idx="3">
+            <a:schemeClr val="accent1"/>
+          </a:fillRef>
+          <a:effectRef idx="2">
+            <a:schemeClr val="accent1"/>
+          </a:effectRef>
+          <a:fontRef idx="minor">
+            <a:schemeClr val="lt1"/>
+          </a:fontRef>
+        </p:style>
+        <p:txBody>
+          <a:bodyPr rtlCol="0" anchor="ctr"/>
+          <a:lstStyle/>
+          <a:p>
+            <a:pPr algn="ctr"/>
+          </a:p>
+        </p:txBody>
+      </p:sp>
       <p:pic>
         <p:nvPicPr>
-          <p:cNvPr id="8" name="Picture 7" descr="check_steel.png"/>
+          <p:cNvPr id="9" name="Picture 8" descr="check_white.png"/>
           <p:cNvPicPr>
             <a:picLocks noChangeAspect="1"/>
           </p:cNvPicPr>
@@ -9932,8 +9843,8 @@
         </p:blipFill>
         <p:spPr>
           <a:xfrm>
-            <a:off x="987552" y="2816352"/>
-            <a:ext cx="237744" cy="237744"/>
+            <a:off x="1110447" y="2930103"/>
+            <a:ext cx="266273" cy="266273"/>
           </a:xfrm>
           <a:prstGeom prst="rect">
             <a:avLst/>
@@ -9942,14 +9853,14 @@
       </p:pic>
       <p:sp>
         <p:nvSpPr>
-          <p:cNvPr id="9" name="TextBox 8"/>
+          <p:cNvPr id="10" name="TextBox 9"/>
           <p:cNvSpPr txBox="1"/>
           <p:nvPr/>
         </p:nvSpPr>
         <p:spPr>
           <a:xfrm>
-            <a:off x="1353312" y="2670048"/>
-            <a:ext cx="5029200" cy="530352"/>
+            <a:off x="1627632" y="2670048"/>
+            <a:ext cx="4206240" cy="786384"/>
           </a:xfrm>
           <a:prstGeom prst="rect">
             <a:avLst/>
@@ -9974,7 +9885,7 @@
               </a:spcAft>
             </a:pPr>
             <a:r>
-              <a:rPr sz="1200" b="0">
+              <a:rPr sz="1150" b="0">
                 <a:solidFill>
                   <a:srgbClr val="1A1A1A"/>
                 </a:solidFill>
@@ -9987,18 +9898,18 @@
       </p:sp>
       <p:sp>
         <p:nvSpPr>
-          <p:cNvPr id="10" name="Rounded Rectangle 9"/>
+          <p:cNvPr id="11" name="Rounded Rectangle 10"/>
           <p:cNvSpPr/>
           <p:nvPr/>
         </p:nvSpPr>
         <p:spPr>
           <a:xfrm>
-            <a:off x="841248" y="3273552"/>
-            <a:ext cx="5715000" cy="530352"/>
+            <a:off x="6254496" y="2670048"/>
+            <a:ext cx="5138928" cy="786384"/>
           </a:xfrm>
           <a:prstGeom prst="roundRect">
             <a:avLst>
-              <a:gd name="adj" fmla="val 6000"/>
+              <a:gd name="adj" fmla="val 7000"/>
             </a:avLst>
           </a:prstGeom>
           <a:solidFill>
@@ -10033,9 +9944,55 @@
           </a:p>
         </p:txBody>
       </p:sp>
+      <p:sp>
+        <p:nvSpPr>
+          <p:cNvPr id="12" name="Rounded Rectangle 11"/>
+          <p:cNvSpPr/>
+          <p:nvPr/>
+        </p:nvSpPr>
+        <p:spPr>
+          <a:xfrm>
+            <a:off x="6400800" y="2807208"/>
+            <a:ext cx="512064" cy="512064"/>
+          </a:xfrm>
+          <a:prstGeom prst="roundRect">
+            <a:avLst>
+              <a:gd name="adj" fmla="val 26000"/>
+            </a:avLst>
+          </a:prstGeom>
+          <a:solidFill>
+            <a:srgbClr val="EE0000"/>
+          </a:solidFill>
+          <a:ln>
+            <a:noFill/>
+          </a:ln>
+          <a:effectLst/>
+        </p:spPr>
+        <p:style>
+          <a:lnRef idx="1">
+            <a:schemeClr val="accent1"/>
+          </a:lnRef>
+          <a:fillRef idx="3">
+            <a:schemeClr val="accent1"/>
+          </a:fillRef>
+          <a:effectRef idx="2">
+            <a:schemeClr val="accent1"/>
+          </a:effectRef>
+          <a:fontRef idx="minor">
+            <a:schemeClr val="lt1"/>
+          </a:fontRef>
+        </p:style>
+        <p:txBody>
+          <a:bodyPr rtlCol="0" anchor="ctr"/>
+          <a:lstStyle/>
+          <a:p>
+            <a:pPr algn="ctr"/>
+          </a:p>
+        </p:txBody>
+      </p:sp>
       <p:pic>
         <p:nvPicPr>
-          <p:cNvPr id="11" name="Picture 10" descr="check_steel.png"/>
+          <p:cNvPr id="13" name="Picture 12" descr="check_white.png"/>
           <p:cNvPicPr>
             <a:picLocks noChangeAspect="1"/>
           </p:cNvPicPr>
@@ -10049,8 +10006,8 @@
         </p:blipFill>
         <p:spPr>
           <a:xfrm>
-            <a:off x="987552" y="3419856"/>
-            <a:ext cx="237744" cy="237744"/>
+            <a:off x="6523695" y="2930103"/>
+            <a:ext cx="266273" cy="266273"/>
           </a:xfrm>
           <a:prstGeom prst="rect">
             <a:avLst/>
@@ -10059,14 +10016,14 @@
       </p:pic>
       <p:sp>
         <p:nvSpPr>
-          <p:cNvPr id="12" name="TextBox 11"/>
+          <p:cNvPr id="14" name="TextBox 13"/>
           <p:cNvSpPr txBox="1"/>
           <p:nvPr/>
         </p:nvSpPr>
         <p:spPr>
           <a:xfrm>
-            <a:off x="1353312" y="3273552"/>
-            <a:ext cx="5029200" cy="530352"/>
+            <a:off x="7040880" y="2670048"/>
+            <a:ext cx="4206240" cy="786384"/>
           </a:xfrm>
           <a:prstGeom prst="rect">
             <a:avLst/>
@@ -10091,7 +10048,7 @@
               </a:spcAft>
             </a:pPr>
             <a:r>
-              <a:rPr sz="1200" b="0">
+              <a:rPr sz="1150" b="0">
                 <a:solidFill>
                   <a:srgbClr val="1A1A1A"/>
                 </a:solidFill>
@@ -10104,18 +10061,18 @@
       </p:sp>
       <p:sp>
         <p:nvSpPr>
-          <p:cNvPr id="13" name="Rounded Rectangle 12"/>
+          <p:cNvPr id="15" name="Rounded Rectangle 14"/>
           <p:cNvSpPr/>
           <p:nvPr/>
         </p:nvSpPr>
         <p:spPr>
           <a:xfrm>
-            <a:off x="841248" y="3877056"/>
-            <a:ext cx="5715000" cy="530352"/>
+            <a:off x="841248" y="3602736"/>
+            <a:ext cx="5138928" cy="786384"/>
           </a:xfrm>
           <a:prstGeom prst="roundRect">
             <a:avLst>
-              <a:gd name="adj" fmla="val 6000"/>
+              <a:gd name="adj" fmla="val 7000"/>
             </a:avLst>
           </a:prstGeom>
           <a:solidFill>
@@ -10150,9 +10107,55 @@
           </a:p>
         </p:txBody>
       </p:sp>
+      <p:sp>
+        <p:nvSpPr>
+          <p:cNvPr id="16" name="Rounded Rectangle 15"/>
+          <p:cNvSpPr/>
+          <p:nvPr/>
+        </p:nvSpPr>
+        <p:spPr>
+          <a:xfrm>
+            <a:off x="987552" y="3739896"/>
+            <a:ext cx="512064" cy="512064"/>
+          </a:xfrm>
+          <a:prstGeom prst="roundRect">
+            <a:avLst>
+              <a:gd name="adj" fmla="val 26000"/>
+            </a:avLst>
+          </a:prstGeom>
+          <a:solidFill>
+            <a:srgbClr val="EE0000"/>
+          </a:solidFill>
+          <a:ln>
+            <a:noFill/>
+          </a:ln>
+          <a:effectLst/>
+        </p:spPr>
+        <p:style>
+          <a:lnRef idx="1">
+            <a:schemeClr val="accent1"/>
+          </a:lnRef>
+          <a:fillRef idx="3">
+            <a:schemeClr val="accent1"/>
+          </a:fillRef>
+          <a:effectRef idx="2">
+            <a:schemeClr val="accent1"/>
+          </a:effectRef>
+          <a:fontRef idx="minor">
+            <a:schemeClr val="lt1"/>
+          </a:fontRef>
+        </p:style>
+        <p:txBody>
+          <a:bodyPr rtlCol="0" anchor="ctr"/>
+          <a:lstStyle/>
+          <a:p>
+            <a:pPr algn="ctr"/>
+          </a:p>
+        </p:txBody>
+      </p:sp>
       <p:pic>
         <p:nvPicPr>
-          <p:cNvPr id="14" name="Picture 13" descr="check_steel.png"/>
+          <p:cNvPr id="17" name="Picture 16" descr="check_white.png"/>
           <p:cNvPicPr>
             <a:picLocks noChangeAspect="1"/>
           </p:cNvPicPr>
@@ -10166,8 +10169,8 @@
         </p:blipFill>
         <p:spPr>
           <a:xfrm>
-            <a:off x="987552" y="4023360"/>
-            <a:ext cx="237744" cy="237744"/>
+            <a:off x="1110447" y="3862791"/>
+            <a:ext cx="266273" cy="266273"/>
           </a:xfrm>
           <a:prstGeom prst="rect">
             <a:avLst/>
@@ -10176,14 +10179,14 @@
       </p:pic>
       <p:sp>
         <p:nvSpPr>
-          <p:cNvPr id="15" name="TextBox 14"/>
+          <p:cNvPr id="18" name="TextBox 17"/>
           <p:cNvSpPr txBox="1"/>
           <p:nvPr/>
         </p:nvSpPr>
         <p:spPr>
           <a:xfrm>
-            <a:off x="1353312" y="3877056"/>
-            <a:ext cx="5029200" cy="530352"/>
+            <a:off x="1627632" y="3602736"/>
+            <a:ext cx="4206240" cy="786384"/>
           </a:xfrm>
           <a:prstGeom prst="rect">
             <a:avLst/>
@@ -10208,7 +10211,7 @@
               </a:spcAft>
             </a:pPr>
             <a:r>
-              <a:rPr sz="1200" b="0">
+              <a:rPr sz="1150" b="0">
                 <a:solidFill>
                   <a:srgbClr val="1A1A1A"/>
                 </a:solidFill>
@@ -10221,18 +10224,18 @@
       </p:sp>
       <p:sp>
         <p:nvSpPr>
-          <p:cNvPr id="16" name="Rounded Rectangle 15"/>
+          <p:cNvPr id="19" name="Rounded Rectangle 18"/>
           <p:cNvSpPr/>
           <p:nvPr/>
         </p:nvSpPr>
         <p:spPr>
           <a:xfrm>
-            <a:off x="841248" y="4480560"/>
-            <a:ext cx="5715000" cy="530352"/>
+            <a:off x="6254496" y="3602736"/>
+            <a:ext cx="5138928" cy="786384"/>
           </a:xfrm>
           <a:prstGeom prst="roundRect">
             <a:avLst>
-              <a:gd name="adj" fmla="val 6000"/>
+              <a:gd name="adj" fmla="val 7000"/>
             </a:avLst>
           </a:prstGeom>
           <a:solidFill>
@@ -10267,9 +10270,55 @@
           </a:p>
         </p:txBody>
       </p:sp>
+      <p:sp>
+        <p:nvSpPr>
+          <p:cNvPr id="20" name="Rounded Rectangle 19"/>
+          <p:cNvSpPr/>
+          <p:nvPr/>
+        </p:nvSpPr>
+        <p:spPr>
+          <a:xfrm>
+            <a:off x="6400800" y="3739896"/>
+            <a:ext cx="512064" cy="512064"/>
+          </a:xfrm>
+          <a:prstGeom prst="roundRect">
+            <a:avLst>
+              <a:gd name="adj" fmla="val 26000"/>
+            </a:avLst>
+          </a:prstGeom>
+          <a:solidFill>
+            <a:srgbClr val="EE0000"/>
+          </a:solidFill>
+          <a:ln>
+            <a:noFill/>
+          </a:ln>
+          <a:effectLst/>
+        </p:spPr>
+        <p:style>
+          <a:lnRef idx="1">
+            <a:schemeClr val="accent1"/>
+          </a:lnRef>
+          <a:fillRef idx="3">
+            <a:schemeClr val="accent1"/>
+          </a:fillRef>
+          <a:effectRef idx="2">
+            <a:schemeClr val="accent1"/>
+          </a:effectRef>
+          <a:fontRef idx="minor">
+            <a:schemeClr val="lt1"/>
+          </a:fontRef>
+        </p:style>
+        <p:txBody>
+          <a:bodyPr rtlCol="0" anchor="ctr"/>
+          <a:lstStyle/>
+          <a:p>
+            <a:pPr algn="ctr"/>
+          </a:p>
+        </p:txBody>
+      </p:sp>
       <p:pic>
         <p:nvPicPr>
-          <p:cNvPr id="17" name="Picture 16" descr="check_steel.png"/>
+          <p:cNvPr id="21" name="Picture 20" descr="check_white.png"/>
           <p:cNvPicPr>
             <a:picLocks noChangeAspect="1"/>
           </p:cNvPicPr>
@@ -10283,8 +10332,8 @@
         </p:blipFill>
         <p:spPr>
           <a:xfrm>
-            <a:off x="987552" y="4626864"/>
-            <a:ext cx="237744" cy="237744"/>
+            <a:off x="6523695" y="3862791"/>
+            <a:ext cx="266273" cy="266273"/>
           </a:xfrm>
           <a:prstGeom prst="rect">
             <a:avLst/>
@@ -10293,14 +10342,14 @@
       </p:pic>
       <p:sp>
         <p:nvSpPr>
-          <p:cNvPr id="18" name="TextBox 17"/>
+          <p:cNvPr id="22" name="TextBox 21"/>
           <p:cNvSpPr txBox="1"/>
           <p:nvPr/>
         </p:nvSpPr>
         <p:spPr>
           <a:xfrm>
-            <a:off x="1353312" y="4480560"/>
-            <a:ext cx="5029200" cy="530352"/>
+            <a:off x="7040880" y="3602736"/>
+            <a:ext cx="4206240" cy="786384"/>
           </a:xfrm>
           <a:prstGeom prst="rect">
             <a:avLst/>
@@ -10325,7 +10374,7 @@
               </a:spcAft>
             </a:pPr>
             <a:r>
-              <a:rPr sz="1200" b="0">
+              <a:rPr sz="1150" b="0">
                 <a:solidFill>
                   <a:srgbClr val="1A1A1A"/>
                 </a:solidFill>
@@ -10338,18 +10387,18 @@
       </p:sp>
       <p:sp>
         <p:nvSpPr>
-          <p:cNvPr id="19" name="Rounded Rectangle 18"/>
+          <p:cNvPr id="23" name="Rounded Rectangle 22"/>
           <p:cNvSpPr/>
           <p:nvPr/>
         </p:nvSpPr>
         <p:spPr>
           <a:xfrm>
-            <a:off x="841248" y="5084064"/>
-            <a:ext cx="5715000" cy="530352"/>
+            <a:off x="841248" y="4535424"/>
+            <a:ext cx="5138928" cy="786384"/>
           </a:xfrm>
           <a:prstGeom prst="roundRect">
             <a:avLst>
-              <a:gd name="adj" fmla="val 6000"/>
+              <a:gd name="adj" fmla="val 7000"/>
             </a:avLst>
           </a:prstGeom>
           <a:solidFill>
@@ -10384,9 +10433,55 @@
           </a:p>
         </p:txBody>
       </p:sp>
+      <p:sp>
+        <p:nvSpPr>
+          <p:cNvPr id="24" name="Rounded Rectangle 23"/>
+          <p:cNvSpPr/>
+          <p:nvPr/>
+        </p:nvSpPr>
+        <p:spPr>
+          <a:xfrm>
+            <a:off x="987552" y="4672584"/>
+            <a:ext cx="512064" cy="512064"/>
+          </a:xfrm>
+          <a:prstGeom prst="roundRect">
+            <a:avLst>
+              <a:gd name="adj" fmla="val 26000"/>
+            </a:avLst>
+          </a:prstGeom>
+          <a:solidFill>
+            <a:srgbClr val="EE0000"/>
+          </a:solidFill>
+          <a:ln>
+            <a:noFill/>
+          </a:ln>
+          <a:effectLst/>
+        </p:spPr>
+        <p:style>
+          <a:lnRef idx="1">
+            <a:schemeClr val="accent1"/>
+          </a:lnRef>
+          <a:fillRef idx="3">
+            <a:schemeClr val="accent1"/>
+          </a:fillRef>
+          <a:effectRef idx="2">
+            <a:schemeClr val="accent1"/>
+          </a:effectRef>
+          <a:fontRef idx="minor">
+            <a:schemeClr val="lt1"/>
+          </a:fontRef>
+        </p:style>
+        <p:txBody>
+          <a:bodyPr rtlCol="0" anchor="ctr"/>
+          <a:lstStyle/>
+          <a:p>
+            <a:pPr algn="ctr"/>
+          </a:p>
+        </p:txBody>
+      </p:sp>
       <p:pic>
         <p:nvPicPr>
-          <p:cNvPr id="20" name="Picture 19" descr="check_steel.png"/>
+          <p:cNvPr id="25" name="Picture 24" descr="check_white.png"/>
           <p:cNvPicPr>
             <a:picLocks noChangeAspect="1"/>
           </p:cNvPicPr>
@@ -10400,8 +10495,8 @@
         </p:blipFill>
         <p:spPr>
           <a:xfrm>
-            <a:off x="987552" y="5230368"/>
-            <a:ext cx="237744" cy="237744"/>
+            <a:off x="1110447" y="4795479"/>
+            <a:ext cx="266273" cy="266273"/>
           </a:xfrm>
           <a:prstGeom prst="rect">
             <a:avLst/>
@@ -10410,14 +10505,14 @@
       </p:pic>
       <p:sp>
         <p:nvSpPr>
-          <p:cNvPr id="21" name="TextBox 20"/>
+          <p:cNvPr id="26" name="TextBox 25"/>
           <p:cNvSpPr txBox="1"/>
           <p:nvPr/>
         </p:nvSpPr>
         <p:spPr>
           <a:xfrm>
-            <a:off x="1353312" y="5084064"/>
-            <a:ext cx="5029200" cy="530352"/>
+            <a:off x="1627632" y="4535424"/>
+            <a:ext cx="4206240" cy="786384"/>
           </a:xfrm>
           <a:prstGeom prst="rect">
             <a:avLst/>
@@ -10442,221 +10537,13 @@
               </a:spcAft>
             </a:pPr>
             <a:r>
-              <a:rPr sz="1200" b="0">
+              <a:rPr sz="1150" b="0">
                 <a:solidFill>
                   <a:srgbClr val="1A1A1A"/>
                 </a:solidFill>
                 <a:latin typeface="Red Hat Text"/>
               </a:rPr>
               <a:t>Nightly pruner: keep unreferenced images referenced</a:t>
-            </a:r>
-          </a:p>
-        </p:txBody>
-      </p:sp>
-      <p:sp>
-        <p:nvSpPr>
-          <p:cNvPr id="22" name="Rounded Rectangle 21"/>
-          <p:cNvSpPr/>
-          <p:nvPr/>
-        </p:nvSpPr>
-        <p:spPr>
-          <a:xfrm>
-            <a:off x="6812280" y="2670048"/>
-            <a:ext cx="4538167" cy="2944368"/>
-          </a:xfrm>
-          <a:prstGeom prst="roundRect">
-            <a:avLst>
-              <a:gd name="adj" fmla="val 4000"/>
-            </a:avLst>
-          </a:prstGeom>
-          <a:solidFill>
-            <a:srgbClr val="FFFFFF"/>
-          </a:solidFill>
-          <a:ln w="15240">
-            <a:solidFill>
-              <a:srgbClr val="DDE1E6"/>
-            </a:solidFill>
-          </a:ln>
-          <a:effectLst/>
-        </p:spPr>
-        <p:style>
-          <a:lnRef idx="1">
-            <a:schemeClr val="accent1"/>
-          </a:lnRef>
-          <a:fillRef idx="3">
-            <a:schemeClr val="accent1"/>
-          </a:fillRef>
-          <a:effectRef idx="2">
-            <a:schemeClr val="accent1"/>
-          </a:effectRef>
-          <a:fontRef idx="minor">
-            <a:schemeClr val="lt1"/>
-          </a:fontRef>
-        </p:style>
-        <p:txBody>
-          <a:bodyPr rtlCol="0" anchor="ctr"/>
-          <a:lstStyle/>
-          <a:p>
-            <a:pPr algn="ctr"/>
-          </a:p>
-        </p:txBody>
-      </p:sp>
-      <p:sp>
-        <p:nvSpPr>
-          <p:cNvPr id="23" name="Rounded Rectangle 22"/>
-          <p:cNvSpPr/>
-          <p:nvPr/>
-        </p:nvSpPr>
-        <p:spPr>
-          <a:xfrm>
-            <a:off x="7013448" y="2871216"/>
-            <a:ext cx="1298448" cy="310896"/>
-          </a:xfrm>
-          <a:prstGeom prst="roundRect">
-            <a:avLst>
-              <a:gd name="adj" fmla="val 50000"/>
-            </a:avLst>
-          </a:prstGeom>
-          <a:solidFill>
-            <a:srgbClr val="FCECEC"/>
-          </a:solidFill>
-          <a:ln>
-            <a:noFill/>
-          </a:ln>
-          <a:effectLst/>
-        </p:spPr>
-        <p:style>
-          <a:lnRef idx="1">
-            <a:schemeClr val="accent1"/>
-          </a:lnRef>
-          <a:fillRef idx="3">
-            <a:schemeClr val="accent1"/>
-          </a:fillRef>
-          <a:effectRef idx="2">
-            <a:schemeClr val="accent1"/>
-          </a:effectRef>
-          <a:fontRef idx="minor">
-            <a:schemeClr val="lt1"/>
-          </a:fontRef>
-        </p:style>
-        <p:txBody>
-          <a:bodyPr rtlCol="0" anchor="ctr"/>
-          <a:lstStyle/>
-          <a:p>
-            <a:pPr algn="ctr"/>
-          </a:p>
-        </p:txBody>
-      </p:sp>
-      <p:sp>
-        <p:nvSpPr>
-          <p:cNvPr id="24" name="TextBox 23"/>
-          <p:cNvSpPr txBox="1"/>
-          <p:nvPr/>
-        </p:nvSpPr>
-        <p:spPr>
-          <a:xfrm>
-            <a:off x="7013448" y="2871216"/>
-            <a:ext cx="1298448" cy="310896"/>
-          </a:xfrm>
-          <a:prstGeom prst="rect">
-            <a:avLst/>
-          </a:prstGeom>
-          <a:noFill/>
-        </p:spPr>
-        <p:txBody>
-          <a:bodyPr wrap="none" anchor="ctr" lIns="0" rIns="0" tIns="0" bIns="0">
-            <a:spAutoFit/>
-          </a:bodyPr>
-          <a:lstStyle/>
-          <a:p>
-            <a:pPr algn="ctr">
-              <a:lnSpc>
-                <a:spcPct val="106000"/>
-              </a:lnSpc>
-              <a:spcBef>
-                <a:spcPts val="0"/>
-              </a:spcBef>
-              <a:spcAft>
-                <a:spcPts val="0"/>
-              </a:spcAft>
-            </a:pPr>
-            <a:r>
-              <a:rPr sz="850" b="1">
-                <a:solidFill>
-                  <a:srgbClr val="B80000"/>
-                </a:solidFill>
-                <a:latin typeface="Red Hat Display"/>
-              </a:rPr>
-              <a:t>MEDIA PASS</a:t>
-            </a:r>
-          </a:p>
-        </p:txBody>
-      </p:sp>
-      <p:pic>
-        <p:nvPicPr>
-          <p:cNvPr id="25" name="Picture 24" descr="eye_slate.png"/>
-          <p:cNvPicPr>
-            <a:picLocks noChangeAspect="1"/>
-          </p:cNvPicPr>
-          <p:nvPr/>
-        </p:nvPicPr>
-        <p:blipFill>
-          <a:blip r:embed="rId4"/>
-          <a:stretch>
-            <a:fillRect/>
-          </a:stretch>
-        </p:blipFill>
-        <p:spPr>
-          <a:xfrm>
-            <a:off x="8843619" y="3383280"/>
-            <a:ext cx="475488" cy="475488"/>
-          </a:xfrm>
-          <a:prstGeom prst="rect">
-            <a:avLst/>
-          </a:prstGeom>
-        </p:spPr>
-      </p:pic>
-      <p:sp>
-        <p:nvSpPr>
-          <p:cNvPr id="26" name="TextBox 25"/>
-          <p:cNvSpPr txBox="1"/>
-          <p:nvPr/>
-        </p:nvSpPr>
-        <p:spPr>
-          <a:xfrm>
-            <a:off x="7050024" y="3995928"/>
-            <a:ext cx="4062679" cy="1481328"/>
-          </a:xfrm>
-          <a:prstGeom prst="rect">
-            <a:avLst/>
-          </a:prstGeom>
-          <a:noFill/>
-        </p:spPr>
-        <p:txBody>
-          <a:bodyPr wrap="square" anchor="t" lIns="0" rIns="0" tIns="0" bIns="0">
-            <a:spAutoFit/>
-          </a:bodyPr>
-          <a:lstStyle/>
-          <a:p>
-            <a:pPr algn="l">
-              <a:lnSpc>
-                <a:spcPct val="120000"/>
-              </a:lnSpc>
-              <a:spcBef>
-                <a:spcPts val="0"/>
-              </a:spcBef>
-              <a:spcAft>
-                <a:spcPts val="0"/>
-              </a:spcAft>
-            </a:pPr>
-            <a:r>
-              <a:rPr sz="950" b="0">
-                <a:solidFill>
-                  <a:srgbClr val="8A9099"/>
-                </a:solidFill>
-                <a:latin typeface="Red Hat Text"/>
-              </a:rPr>
-              <a:t>A two-column "who runs what" table — left green "you (namespaced)", right amber "instructor (cluster-wide)" — with a small clock icon on the pruner row and a "reboots nodes" warning icon on the registrySources/IDMS row.</a:t>
             </a:r>
           </a:p>
         </p:txBody>
@@ -10964,11 +10851,11 @@
         <p:spPr>
           <a:xfrm>
             <a:off x="841248" y="2395728"/>
-            <a:ext cx="5715000" cy="530352"/>
+            <a:ext cx="5138928" cy="786384"/>
           </a:xfrm>
           <a:prstGeom prst="roundRect">
             <a:avLst>
-              <a:gd name="adj" fmla="val 6000"/>
+              <a:gd name="adj" fmla="val 7000"/>
             </a:avLst>
           </a:prstGeom>
           <a:solidFill>
@@ -11003,9 +10890,55 @@
           </a:p>
         </p:txBody>
       </p:sp>
+      <p:sp>
+        <p:nvSpPr>
+          <p:cNvPr id="7" name="Rounded Rectangle 6"/>
+          <p:cNvSpPr/>
+          <p:nvPr/>
+        </p:nvSpPr>
+        <p:spPr>
+          <a:xfrm>
+            <a:off x="987552" y="2532888"/>
+            <a:ext cx="512064" cy="512064"/>
+          </a:xfrm>
+          <a:prstGeom prst="roundRect">
+            <a:avLst>
+              <a:gd name="adj" fmla="val 26000"/>
+            </a:avLst>
+          </a:prstGeom>
+          <a:solidFill>
+            <a:srgbClr val="EE0000"/>
+          </a:solidFill>
+          <a:ln>
+            <a:noFill/>
+          </a:ln>
+          <a:effectLst/>
+        </p:spPr>
+        <p:style>
+          <a:lnRef idx="1">
+            <a:schemeClr val="accent1"/>
+          </a:lnRef>
+          <a:fillRef idx="3">
+            <a:schemeClr val="accent1"/>
+          </a:fillRef>
+          <a:effectRef idx="2">
+            <a:schemeClr val="accent1"/>
+          </a:effectRef>
+          <a:fontRef idx="minor">
+            <a:schemeClr val="lt1"/>
+          </a:fontRef>
+        </p:style>
+        <p:txBody>
+          <a:bodyPr rtlCol="0" anchor="ctr"/>
+          <a:lstStyle/>
+          <a:p>
+            <a:pPr algn="ctr"/>
+          </a:p>
+        </p:txBody>
+      </p:sp>
       <p:pic>
         <p:nvPicPr>
-          <p:cNvPr id="7" name="Picture 6" descr="check_steel.png"/>
+          <p:cNvPr id="8" name="Picture 7" descr="check_white.png"/>
           <p:cNvPicPr>
             <a:picLocks noChangeAspect="1"/>
           </p:cNvPicPr>
@@ -11019,8 +10952,8 @@
         </p:blipFill>
         <p:spPr>
           <a:xfrm>
-            <a:off x="987552" y="2542032"/>
-            <a:ext cx="237744" cy="237744"/>
+            <a:off x="1110447" y="2655783"/>
+            <a:ext cx="266273" cy="266273"/>
           </a:xfrm>
           <a:prstGeom prst="rect">
             <a:avLst/>
@@ -11029,14 +10962,14 @@
       </p:pic>
       <p:sp>
         <p:nvSpPr>
-          <p:cNvPr id="8" name="TextBox 7"/>
+          <p:cNvPr id="9" name="TextBox 8"/>
           <p:cNvSpPr txBox="1"/>
           <p:nvPr/>
         </p:nvSpPr>
         <p:spPr>
           <a:xfrm>
-            <a:off x="1353312" y="2395728"/>
-            <a:ext cx="5029200" cy="530352"/>
+            <a:off x="1627632" y="2395728"/>
+            <a:ext cx="4206240" cy="786384"/>
           </a:xfrm>
           <a:prstGeom prst="rect">
             <a:avLst/>
@@ -11061,7 +10994,7 @@
               </a:spcAft>
             </a:pPr>
             <a:r>
-              <a:rPr sz="1200" b="0">
+              <a:rPr sz="1150" b="0">
                 <a:solidFill>
                   <a:srgbClr val="1A1A1A"/>
                 </a:solidFill>
@@ -11074,18 +11007,18 @@
       </p:sp>
       <p:sp>
         <p:nvSpPr>
-          <p:cNvPr id="9" name="Rounded Rectangle 8"/>
+          <p:cNvPr id="10" name="Rounded Rectangle 9"/>
           <p:cNvSpPr/>
           <p:nvPr/>
         </p:nvSpPr>
         <p:spPr>
           <a:xfrm>
-            <a:off x="841248" y="2999232"/>
-            <a:ext cx="5715000" cy="530352"/>
+            <a:off x="6254496" y="2395728"/>
+            <a:ext cx="5138928" cy="786384"/>
           </a:xfrm>
           <a:prstGeom prst="roundRect">
             <a:avLst>
-              <a:gd name="adj" fmla="val 6000"/>
+              <a:gd name="adj" fmla="val 7000"/>
             </a:avLst>
           </a:prstGeom>
           <a:solidFill>
@@ -11120,9 +11053,55 @@
           </a:p>
         </p:txBody>
       </p:sp>
+      <p:sp>
+        <p:nvSpPr>
+          <p:cNvPr id="11" name="Rounded Rectangle 10"/>
+          <p:cNvSpPr/>
+          <p:nvPr/>
+        </p:nvSpPr>
+        <p:spPr>
+          <a:xfrm>
+            <a:off x="6400800" y="2532888"/>
+            <a:ext cx="512064" cy="512064"/>
+          </a:xfrm>
+          <a:prstGeom prst="roundRect">
+            <a:avLst>
+              <a:gd name="adj" fmla="val 26000"/>
+            </a:avLst>
+          </a:prstGeom>
+          <a:solidFill>
+            <a:srgbClr val="EE0000"/>
+          </a:solidFill>
+          <a:ln>
+            <a:noFill/>
+          </a:ln>
+          <a:effectLst/>
+        </p:spPr>
+        <p:style>
+          <a:lnRef idx="1">
+            <a:schemeClr val="accent1"/>
+          </a:lnRef>
+          <a:fillRef idx="3">
+            <a:schemeClr val="accent1"/>
+          </a:fillRef>
+          <a:effectRef idx="2">
+            <a:schemeClr val="accent1"/>
+          </a:effectRef>
+          <a:fontRef idx="minor">
+            <a:schemeClr val="lt1"/>
+          </a:fontRef>
+        </p:style>
+        <p:txBody>
+          <a:bodyPr rtlCol="0" anchor="ctr"/>
+          <a:lstStyle/>
+          <a:p>
+            <a:pPr algn="ctr"/>
+          </a:p>
+        </p:txBody>
+      </p:sp>
       <p:pic>
         <p:nvPicPr>
-          <p:cNvPr id="10" name="Picture 9" descr="check_steel.png"/>
+          <p:cNvPr id="12" name="Picture 11" descr="check_white.png"/>
           <p:cNvPicPr>
             <a:picLocks noChangeAspect="1"/>
           </p:cNvPicPr>
@@ -11136,8 +11115,8 @@
         </p:blipFill>
         <p:spPr>
           <a:xfrm>
-            <a:off x="987552" y="3145536"/>
-            <a:ext cx="237744" cy="237744"/>
+            <a:off x="6523695" y="2655783"/>
+            <a:ext cx="266273" cy="266273"/>
           </a:xfrm>
           <a:prstGeom prst="rect">
             <a:avLst/>
@@ -11146,14 +11125,14 @@
       </p:pic>
       <p:sp>
         <p:nvSpPr>
-          <p:cNvPr id="11" name="TextBox 10"/>
+          <p:cNvPr id="13" name="TextBox 12"/>
           <p:cNvSpPr txBox="1"/>
           <p:nvPr/>
         </p:nvSpPr>
         <p:spPr>
           <a:xfrm>
-            <a:off x="1353312" y="2999232"/>
-            <a:ext cx="5029200" cy="530352"/>
+            <a:off x="7040880" y="2395728"/>
+            <a:ext cx="4206240" cy="786384"/>
           </a:xfrm>
           <a:prstGeom prst="rect">
             <a:avLst/>
@@ -11178,7 +11157,7 @@
               </a:spcAft>
             </a:pPr>
             <a:r>
-              <a:rPr sz="1200" b="0">
+              <a:rPr sz="1150" b="0">
                 <a:solidFill>
                   <a:srgbClr val="1A1A1A"/>
                 </a:solidFill>
@@ -11191,18 +11170,18 @@
       </p:sp>
       <p:sp>
         <p:nvSpPr>
-          <p:cNvPr id="12" name="Rounded Rectangle 11"/>
+          <p:cNvPr id="14" name="Rounded Rectangle 13"/>
           <p:cNvSpPr/>
           <p:nvPr/>
         </p:nvSpPr>
         <p:spPr>
           <a:xfrm>
-            <a:off x="841248" y="3602736"/>
-            <a:ext cx="5715000" cy="530352"/>
+            <a:off x="841248" y="3328416"/>
+            <a:ext cx="5138928" cy="786384"/>
           </a:xfrm>
           <a:prstGeom prst="roundRect">
             <a:avLst>
-              <a:gd name="adj" fmla="val 6000"/>
+              <a:gd name="adj" fmla="val 7000"/>
             </a:avLst>
           </a:prstGeom>
           <a:solidFill>
@@ -11237,9 +11216,55 @@
           </a:p>
         </p:txBody>
       </p:sp>
+      <p:sp>
+        <p:nvSpPr>
+          <p:cNvPr id="15" name="Rounded Rectangle 14"/>
+          <p:cNvSpPr/>
+          <p:nvPr/>
+        </p:nvSpPr>
+        <p:spPr>
+          <a:xfrm>
+            <a:off x="987552" y="3465576"/>
+            <a:ext cx="512064" cy="512064"/>
+          </a:xfrm>
+          <a:prstGeom prst="roundRect">
+            <a:avLst>
+              <a:gd name="adj" fmla="val 26000"/>
+            </a:avLst>
+          </a:prstGeom>
+          <a:solidFill>
+            <a:srgbClr val="EE0000"/>
+          </a:solidFill>
+          <a:ln>
+            <a:noFill/>
+          </a:ln>
+          <a:effectLst/>
+        </p:spPr>
+        <p:style>
+          <a:lnRef idx="1">
+            <a:schemeClr val="accent1"/>
+          </a:lnRef>
+          <a:fillRef idx="3">
+            <a:schemeClr val="accent1"/>
+          </a:fillRef>
+          <a:effectRef idx="2">
+            <a:schemeClr val="accent1"/>
+          </a:effectRef>
+          <a:fontRef idx="minor">
+            <a:schemeClr val="lt1"/>
+          </a:fontRef>
+        </p:style>
+        <p:txBody>
+          <a:bodyPr rtlCol="0" anchor="ctr"/>
+          <a:lstStyle/>
+          <a:p>
+            <a:pPr algn="ctr"/>
+          </a:p>
+        </p:txBody>
+      </p:sp>
       <p:pic>
         <p:nvPicPr>
-          <p:cNvPr id="13" name="Picture 12" descr="check_steel.png"/>
+          <p:cNvPr id="16" name="Picture 15" descr="check_white.png"/>
           <p:cNvPicPr>
             <a:picLocks noChangeAspect="1"/>
           </p:cNvPicPr>
@@ -11253,8 +11278,8 @@
         </p:blipFill>
         <p:spPr>
           <a:xfrm>
-            <a:off x="987552" y="3749040"/>
-            <a:ext cx="237744" cy="237744"/>
+            <a:off x="1110447" y="3588471"/>
+            <a:ext cx="266273" cy="266273"/>
           </a:xfrm>
           <a:prstGeom prst="rect">
             <a:avLst/>
@@ -11263,14 +11288,14 @@
       </p:pic>
       <p:sp>
         <p:nvSpPr>
-          <p:cNvPr id="14" name="TextBox 13"/>
+          <p:cNvPr id="17" name="TextBox 16"/>
           <p:cNvSpPr txBox="1"/>
           <p:nvPr/>
         </p:nvSpPr>
         <p:spPr>
           <a:xfrm>
-            <a:off x="1353312" y="3602736"/>
-            <a:ext cx="5029200" cy="530352"/>
+            <a:off x="1627632" y="3328416"/>
+            <a:ext cx="4206240" cy="786384"/>
           </a:xfrm>
           <a:prstGeom prst="rect">
             <a:avLst/>
@@ -11295,7 +11320,7 @@
               </a:spcAft>
             </a:pPr>
             <a:r>
-              <a:rPr sz="1200" b="0">
+              <a:rPr sz="1150" b="0">
                 <a:solidFill>
                   <a:srgbClr val="1A1A1A"/>
                 </a:solidFill>
@@ -11308,18 +11333,18 @@
       </p:sp>
       <p:sp>
         <p:nvSpPr>
-          <p:cNvPr id="15" name="Rounded Rectangle 14"/>
+          <p:cNvPr id="18" name="Rounded Rectangle 17"/>
           <p:cNvSpPr/>
           <p:nvPr/>
         </p:nvSpPr>
         <p:spPr>
           <a:xfrm>
-            <a:off x="841248" y="4206240"/>
-            <a:ext cx="5715000" cy="530352"/>
+            <a:off x="6254496" y="3328416"/>
+            <a:ext cx="5138928" cy="786384"/>
           </a:xfrm>
           <a:prstGeom prst="roundRect">
             <a:avLst>
-              <a:gd name="adj" fmla="val 6000"/>
+              <a:gd name="adj" fmla="val 7000"/>
             </a:avLst>
           </a:prstGeom>
           <a:solidFill>
@@ -11354,9 +11379,55 @@
           </a:p>
         </p:txBody>
       </p:sp>
+      <p:sp>
+        <p:nvSpPr>
+          <p:cNvPr id="19" name="Rounded Rectangle 18"/>
+          <p:cNvSpPr/>
+          <p:nvPr/>
+        </p:nvSpPr>
+        <p:spPr>
+          <a:xfrm>
+            <a:off x="6400800" y="3465576"/>
+            <a:ext cx="512064" cy="512064"/>
+          </a:xfrm>
+          <a:prstGeom prst="roundRect">
+            <a:avLst>
+              <a:gd name="adj" fmla="val 26000"/>
+            </a:avLst>
+          </a:prstGeom>
+          <a:solidFill>
+            <a:srgbClr val="EE0000"/>
+          </a:solidFill>
+          <a:ln>
+            <a:noFill/>
+          </a:ln>
+          <a:effectLst/>
+        </p:spPr>
+        <p:style>
+          <a:lnRef idx="1">
+            <a:schemeClr val="accent1"/>
+          </a:lnRef>
+          <a:fillRef idx="3">
+            <a:schemeClr val="accent1"/>
+          </a:fillRef>
+          <a:effectRef idx="2">
+            <a:schemeClr val="accent1"/>
+          </a:effectRef>
+          <a:fontRef idx="minor">
+            <a:schemeClr val="lt1"/>
+          </a:fontRef>
+        </p:style>
+        <p:txBody>
+          <a:bodyPr rtlCol="0" anchor="ctr"/>
+          <a:lstStyle/>
+          <a:p>
+            <a:pPr algn="ctr"/>
+          </a:p>
+        </p:txBody>
+      </p:sp>
       <p:pic>
         <p:nvPicPr>
-          <p:cNvPr id="16" name="Picture 15" descr="check_steel.png"/>
+          <p:cNvPr id="20" name="Picture 19" descr="check_white.png"/>
           <p:cNvPicPr>
             <a:picLocks noChangeAspect="1"/>
           </p:cNvPicPr>
@@ -11370,8 +11441,8 @@
         </p:blipFill>
         <p:spPr>
           <a:xfrm>
-            <a:off x="987552" y="4352544"/>
-            <a:ext cx="237744" cy="237744"/>
+            <a:off x="6523695" y="3588471"/>
+            <a:ext cx="266273" cy="266273"/>
           </a:xfrm>
           <a:prstGeom prst="rect">
             <a:avLst/>
@@ -11380,14 +11451,14 @@
       </p:pic>
       <p:sp>
         <p:nvSpPr>
-          <p:cNvPr id="17" name="TextBox 16"/>
+          <p:cNvPr id="21" name="TextBox 20"/>
           <p:cNvSpPr txBox="1"/>
           <p:nvPr/>
         </p:nvSpPr>
         <p:spPr>
           <a:xfrm>
-            <a:off x="1353312" y="4206240"/>
-            <a:ext cx="5029200" cy="530352"/>
+            <a:off x="7040880" y="3328416"/>
+            <a:ext cx="4206240" cy="786384"/>
           </a:xfrm>
           <a:prstGeom prst="rect">
             <a:avLst/>
@@ -11412,7 +11483,7 @@
               </a:spcAft>
             </a:pPr>
             <a:r>
-              <a:rPr sz="1200" b="0">
+              <a:rPr sz="1150" b="0">
                 <a:solidFill>
                   <a:srgbClr val="1A1A1A"/>
                 </a:solidFill>
@@ -11425,18 +11496,18 @@
       </p:sp>
       <p:sp>
         <p:nvSpPr>
-          <p:cNvPr id="18" name="Rounded Rectangle 17"/>
+          <p:cNvPr id="22" name="Rounded Rectangle 21"/>
           <p:cNvSpPr/>
           <p:nvPr/>
         </p:nvSpPr>
         <p:spPr>
           <a:xfrm>
-            <a:off x="841248" y="4809744"/>
-            <a:ext cx="5715000" cy="530352"/>
+            <a:off x="841248" y="4261104"/>
+            <a:ext cx="5138928" cy="786384"/>
           </a:xfrm>
           <a:prstGeom prst="roundRect">
             <a:avLst>
-              <a:gd name="adj" fmla="val 6000"/>
+              <a:gd name="adj" fmla="val 7000"/>
             </a:avLst>
           </a:prstGeom>
           <a:solidFill>
@@ -11471,9 +11542,55 @@
           </a:p>
         </p:txBody>
       </p:sp>
+      <p:sp>
+        <p:nvSpPr>
+          <p:cNvPr id="23" name="Rounded Rectangle 22"/>
+          <p:cNvSpPr/>
+          <p:nvPr/>
+        </p:nvSpPr>
+        <p:spPr>
+          <a:xfrm>
+            <a:off x="987552" y="4398264"/>
+            <a:ext cx="512064" cy="512064"/>
+          </a:xfrm>
+          <a:prstGeom prst="roundRect">
+            <a:avLst>
+              <a:gd name="adj" fmla="val 26000"/>
+            </a:avLst>
+          </a:prstGeom>
+          <a:solidFill>
+            <a:srgbClr val="EE0000"/>
+          </a:solidFill>
+          <a:ln>
+            <a:noFill/>
+          </a:ln>
+          <a:effectLst/>
+        </p:spPr>
+        <p:style>
+          <a:lnRef idx="1">
+            <a:schemeClr val="accent1"/>
+          </a:lnRef>
+          <a:fillRef idx="3">
+            <a:schemeClr val="accent1"/>
+          </a:fillRef>
+          <a:effectRef idx="2">
+            <a:schemeClr val="accent1"/>
+          </a:effectRef>
+          <a:fontRef idx="minor">
+            <a:schemeClr val="lt1"/>
+          </a:fontRef>
+        </p:style>
+        <p:txBody>
+          <a:bodyPr rtlCol="0" anchor="ctr"/>
+          <a:lstStyle/>
+          <a:p>
+            <a:pPr algn="ctr"/>
+          </a:p>
+        </p:txBody>
+      </p:sp>
       <p:pic>
         <p:nvPicPr>
-          <p:cNvPr id="19" name="Picture 18" descr="check_steel.png"/>
+          <p:cNvPr id="24" name="Picture 23" descr="check_white.png"/>
           <p:cNvPicPr>
             <a:picLocks noChangeAspect="1"/>
           </p:cNvPicPr>
@@ -11487,8 +11604,8 @@
         </p:blipFill>
         <p:spPr>
           <a:xfrm>
-            <a:off x="987552" y="4956048"/>
-            <a:ext cx="237744" cy="237744"/>
+            <a:off x="1110447" y="4521159"/>
+            <a:ext cx="266273" cy="266273"/>
           </a:xfrm>
           <a:prstGeom prst="rect">
             <a:avLst/>
@@ -11497,14 +11614,14 @@
       </p:pic>
       <p:sp>
         <p:nvSpPr>
-          <p:cNvPr id="20" name="TextBox 19"/>
+          <p:cNvPr id="25" name="TextBox 24"/>
           <p:cNvSpPr txBox="1"/>
           <p:nvPr/>
         </p:nvSpPr>
         <p:spPr>
           <a:xfrm>
-            <a:off x="1353312" y="4809744"/>
-            <a:ext cx="5029200" cy="530352"/>
+            <a:off x="1627632" y="4261104"/>
+            <a:ext cx="4206240" cy="786384"/>
           </a:xfrm>
           <a:prstGeom prst="rect">
             <a:avLst/>
@@ -11529,7 +11646,7 @@
               </a:spcAft>
             </a:pPr>
             <a:r>
-              <a:rPr sz="1200" b="0">
+              <a:rPr sz="1150" b="0">
                 <a:solidFill>
                   <a:srgbClr val="1A1A1A"/>
                 </a:solidFill>
@@ -11540,16 +11657,310 @@
           </a:p>
         </p:txBody>
       </p:sp>
-      <p:sp>
-        <p:nvSpPr>
-          <p:cNvPr id="21" name="Rounded Rectangle 20"/>
+      <p:cxnSp>
+        <p:nvCxnSpPr>
+          <p:cNvPr id="26" name="Connector 25"/>
+          <p:cNvCxnSpPr/>
+          <p:nvPr/>
+        </p:nvCxnSpPr>
+        <p:spPr>
+          <a:xfrm>
+            <a:off x="841248" y="6437376"/>
+            <a:ext cx="10509199" cy="0"/>
+          </a:xfrm>
+          <a:prstGeom prst="bentConnector3">
+            <a:avLst/>
+          </a:prstGeom>
+          <a:ln w="12700">
+            <a:solidFill>
+              <a:srgbClr val="DDE1E6"/>
+            </a:solidFill>
+          </a:ln>
+          <a:effectLst/>
+        </p:spPr>
+        <p:style>
+          <a:lnRef idx="2">
+            <a:schemeClr val="accent1"/>
+          </a:lnRef>
+          <a:fillRef idx="0">
+            <a:schemeClr val="accent1"/>
+          </a:fillRef>
+          <a:effectRef idx="1">
+            <a:schemeClr val="accent1"/>
+          </a:effectRef>
+          <a:fontRef idx="minor">
+            <a:schemeClr val="tx1"/>
+          </a:fontRef>
+        </p:style>
+      </p:cxnSp>
+      <p:sp>
+        <p:nvSpPr>
+          <p:cNvPr id="27" name="TextBox 26"/>
+          <p:cNvSpPr txBox="1"/>
+          <p:nvPr/>
+        </p:nvSpPr>
+        <p:spPr>
+          <a:xfrm>
+            <a:off x="841248" y="6473952"/>
+            <a:ext cx="7315200" cy="274320"/>
+          </a:xfrm>
+          <a:prstGeom prst="rect">
+            <a:avLst/>
+          </a:prstGeom>
+          <a:noFill/>
+        </p:spPr>
+        <p:txBody>
+          <a:bodyPr wrap="square" anchor="t" lIns="0" rIns="0" tIns="0" bIns="0">
+            <a:spAutoFit/>
+          </a:bodyPr>
+          <a:lstStyle/>
+          <a:p>
+            <a:pPr algn="l">
+              <a:lnSpc>
+                <a:spcPct val="106000"/>
+              </a:lnSpc>
+              <a:spcBef>
+                <a:spcPts val="0"/>
+              </a:spcBef>
+              <a:spcAft>
+                <a:spcPts val="0"/>
+              </a:spcAft>
+            </a:pPr>
+            <a:r>
+              <a:rPr sz="950" b="0">
+                <a:solidFill>
+                  <a:srgbClr val="8A9099"/>
+                </a:solidFill>
+                <a:latin typeface="Red Hat Text"/>
+              </a:rPr>
+              <a:t>CONFIDENTIAL</a:t>
+            </a:r>
+          </a:p>
+        </p:txBody>
+      </p:sp>
+      <p:sp>
+        <p:nvSpPr>
+          <p:cNvPr id="28" name="TextBox 27"/>
+          <p:cNvSpPr txBox="1"/>
+          <p:nvPr/>
+        </p:nvSpPr>
+        <p:spPr>
+          <a:xfrm>
+            <a:off x="10801807" y="6473952"/>
+            <a:ext cx="548640" cy="274320"/>
+          </a:xfrm>
+          <a:prstGeom prst="rect">
+            <a:avLst/>
+          </a:prstGeom>
+          <a:noFill/>
+        </p:spPr>
+        <p:txBody>
+          <a:bodyPr wrap="square" anchor="t" lIns="0" rIns="0" tIns="0" bIns="0">
+            <a:spAutoFit/>
+          </a:bodyPr>
+          <a:lstStyle/>
+          <a:p>
+            <a:pPr algn="r">
+              <a:lnSpc>
+                <a:spcPct val="106000"/>
+              </a:lnSpc>
+              <a:spcBef>
+                <a:spcPts val="0"/>
+              </a:spcBef>
+              <a:spcAft>
+                <a:spcPts val="0"/>
+              </a:spcAft>
+            </a:pPr>
+            <a:r>
+              <a:rPr sz="950" b="0">
+                <a:solidFill>
+                  <a:srgbClr val="8A9099"/>
+                </a:solidFill>
+                <a:latin typeface="Red Hat Text"/>
+              </a:rPr>
+              <a:t>7</a:t>
+            </a:r>
+          </a:p>
+        </p:txBody>
+      </p:sp>
+    </p:spTree>
+  </p:cSld>
+  <p:clrMapOvr>
+    <a:masterClrMapping/>
+  </p:clrMapOvr>
+</p:sld>
+</file>
+
+<file path=ppt/slides/slide9.xml><?xml version="1.0" encoding="utf-8"?>
+<p:sld xmlns:a="http://schemas.openxmlformats.org/drawingml/2006/main" xmlns:p="http://schemas.openxmlformats.org/presentationml/2006/main" xmlns:r="http://schemas.openxmlformats.org/officeDocument/2006/relationships">
+  <p:cSld>
+    <p:spTree>
+      <p:nvGrpSpPr>
+        <p:cNvPr id="1" name=""/>
+        <p:cNvGrpSpPr/>
+        <p:nvPr/>
+      </p:nvGrpSpPr>
+      <p:grpSpPr/>
+      <p:pic>
+        <p:nvPicPr>
+          <p:cNvPr id="2" name="Picture 1" descr="redhat_logo.jpg"/>
+          <p:cNvPicPr>
+            <a:picLocks noChangeAspect="1"/>
+          </p:cNvPicPr>
+          <p:nvPr/>
+        </p:nvPicPr>
+        <p:blipFill>
+          <a:blip r:embed="rId2"/>
+          <a:stretch>
+            <a:fillRect/>
+          </a:stretch>
+        </p:blipFill>
+        <p:spPr>
+          <a:xfrm>
+            <a:off x="10326319" y="475488"/>
+            <a:ext cx="1024128" cy="242248"/>
+          </a:xfrm>
+          <a:prstGeom prst="rect">
+            <a:avLst/>
+          </a:prstGeom>
+        </p:spPr>
+      </p:pic>
+      <p:sp>
+        <p:nvSpPr>
+          <p:cNvPr id="3" name="TextBox 2"/>
+          <p:cNvSpPr txBox="1"/>
+          <p:nvPr/>
+        </p:nvSpPr>
+        <p:spPr>
+          <a:xfrm>
+            <a:off x="841248" y="548640"/>
+            <a:ext cx="8595360" cy="274320"/>
+          </a:xfrm>
+          <a:prstGeom prst="rect">
+            <a:avLst/>
+          </a:prstGeom>
+          <a:noFill/>
+        </p:spPr>
+        <p:txBody>
+          <a:bodyPr wrap="square" anchor="t" lIns="0" rIns="0" tIns="0" bIns="0">
+            <a:spAutoFit/>
+          </a:bodyPr>
+          <a:lstStyle/>
+          <a:p>
+            <a:pPr algn="l">
+              <a:lnSpc>
+                <a:spcPct val="106000"/>
+              </a:lnSpc>
+              <a:spcBef>
+                <a:spcPts val="0"/>
+              </a:spcBef>
+              <a:spcAft>
+                <a:spcPts val="0"/>
+              </a:spcAft>
+            </a:pPr>
+            <a:r>
+              <a:rPr sz="1250" b="1" spc="220">
+                <a:solidFill>
+                  <a:srgbClr val="EE0000"/>
+                </a:solidFill>
+                <a:latin typeface="Red Hat Display"/>
+              </a:rPr>
+              <a:t>M18 · REGISTRY, IMAGES &amp; CATALOG GOVERNANCE</a:t>
+            </a:r>
+          </a:p>
+        </p:txBody>
+      </p:sp>
+      <p:sp>
+        <p:nvSpPr>
+          <p:cNvPr id="4" name="TextBox 3"/>
+          <p:cNvSpPr txBox="1"/>
+          <p:nvPr/>
+        </p:nvSpPr>
+        <p:spPr>
+          <a:xfrm>
+            <a:off x="841248" y="877824"/>
+            <a:ext cx="10515600" cy="548640"/>
+          </a:xfrm>
+          <a:prstGeom prst="rect">
+            <a:avLst/>
+          </a:prstGeom>
+          <a:noFill/>
+        </p:spPr>
+        <p:txBody>
+          <a:bodyPr wrap="none" anchor="t" lIns="0" rIns="0" tIns="0" bIns="0">
+            <a:spAutoFit/>
+          </a:bodyPr>
+          <a:lstStyle/>
+          <a:p>
+            <a:pPr algn="l">
+              <a:lnSpc>
+                <a:spcPct val="100000"/>
+              </a:lnSpc>
+              <a:spcBef>
+                <a:spcPts val="0"/>
+              </a:spcBef>
+              <a:spcAft>
+                <a:spcPts val="0"/>
+              </a:spcAft>
+            </a:pPr>
+            <a:r>
+              <a:rPr sz="2500" b="1">
+                <a:solidFill>
+                  <a:srgbClr val="1A1A1A"/>
+                </a:solidFill>
+                <a:latin typeface="Red Hat Display"/>
+              </a:rPr>
+              <a:t>What you built</a:t>
+            </a:r>
+          </a:p>
+        </p:txBody>
+      </p:sp>
+      <p:cxnSp>
+        <p:nvCxnSpPr>
+          <p:cNvPr id="5" name="Connector 4"/>
+          <p:cNvCxnSpPr/>
+          <p:nvPr/>
+        </p:nvCxnSpPr>
+        <p:spPr>
+          <a:xfrm>
+            <a:off x="841248" y="1554480"/>
+            <a:ext cx="1371600" cy="0"/>
+          </a:xfrm>
+          <a:prstGeom prst="bentConnector3">
+            <a:avLst/>
+          </a:prstGeom>
+          <a:ln w="31750">
+            <a:solidFill>
+              <a:srgbClr val="EE0000"/>
+            </a:solidFill>
+          </a:ln>
+          <a:effectLst/>
+        </p:spPr>
+        <p:style>
+          <a:lnRef idx="2">
+            <a:schemeClr val="accent1"/>
+          </a:lnRef>
+          <a:fillRef idx="0">
+            <a:schemeClr val="accent1"/>
+          </a:fillRef>
+          <a:effectRef idx="1">
+            <a:schemeClr val="accent1"/>
+          </a:effectRef>
+          <a:fontRef idx="minor">
+            <a:schemeClr val="tx1"/>
+          </a:fontRef>
+        </p:style>
+      </p:cxnSp>
+      <p:sp>
+        <p:nvSpPr>
+          <p:cNvPr id="6" name="Rounded Rectangle 5"/>
           <p:cNvSpPr/>
           <p:nvPr/>
         </p:nvSpPr>
         <p:spPr>
           <a:xfrm>
-            <a:off x="6812280" y="2395728"/>
-            <a:ext cx="4538167" cy="2944368"/>
+            <a:off x="841248" y="2331720"/>
+            <a:ext cx="10509199" cy="3794760"/>
           </a:xfrm>
           <a:prstGeom prst="roundRect">
             <a:avLst>
@@ -11588,169 +11999,33 @@
           </a:p>
         </p:txBody>
       </p:sp>
-      <p:sp>
-        <p:nvSpPr>
-          <p:cNvPr id="22" name="Rounded Rectangle 21"/>
-          <p:cNvSpPr/>
-          <p:nvPr/>
-        </p:nvSpPr>
-        <p:spPr>
-          <a:xfrm>
-            <a:off x="7013448" y="2596896"/>
-            <a:ext cx="1298448" cy="310896"/>
-          </a:xfrm>
-          <a:prstGeom prst="roundRect">
-            <a:avLst>
-              <a:gd name="adj" fmla="val 50000"/>
-            </a:avLst>
-          </a:prstGeom>
-          <a:solidFill>
-            <a:srgbClr val="FCECEC"/>
-          </a:solidFill>
-          <a:ln>
-            <a:noFill/>
-          </a:ln>
-          <a:effectLst/>
-        </p:spPr>
-        <p:style>
-          <a:lnRef idx="1">
-            <a:schemeClr val="accent1"/>
-          </a:lnRef>
-          <a:fillRef idx="3">
-            <a:schemeClr val="accent1"/>
-          </a:fillRef>
-          <a:effectRef idx="2">
-            <a:schemeClr val="accent1"/>
-          </a:effectRef>
-          <a:fontRef idx="minor">
-            <a:schemeClr val="lt1"/>
-          </a:fontRef>
-        </p:style>
-        <p:txBody>
-          <a:bodyPr rtlCol="0" anchor="ctr"/>
-          <a:lstStyle/>
-          <a:p>
-            <a:pPr algn="ctr"/>
-          </a:p>
-        </p:txBody>
-      </p:sp>
-      <p:sp>
-        <p:nvSpPr>
-          <p:cNvPr id="23" name="TextBox 22"/>
-          <p:cNvSpPr txBox="1"/>
-          <p:nvPr/>
-        </p:nvSpPr>
-        <p:spPr>
-          <a:xfrm>
-            <a:off x="7013448" y="2596896"/>
-            <a:ext cx="1298448" cy="310896"/>
-          </a:xfrm>
-          <a:prstGeom prst="rect">
-            <a:avLst/>
-          </a:prstGeom>
-          <a:noFill/>
-        </p:spPr>
-        <p:txBody>
-          <a:bodyPr wrap="none" anchor="ctr" lIns="0" rIns="0" tIns="0" bIns="0">
-            <a:spAutoFit/>
-          </a:bodyPr>
-          <a:lstStyle/>
-          <a:p>
-            <a:pPr algn="ctr">
-              <a:lnSpc>
-                <a:spcPct val="106000"/>
-              </a:lnSpc>
-              <a:spcBef>
-                <a:spcPts val="0"/>
-              </a:spcBef>
-              <a:spcAft>
-                <a:spcPts val="0"/>
-              </a:spcAft>
-            </a:pPr>
-            <a:r>
-              <a:rPr sz="850" b="1">
-                <a:solidFill>
-                  <a:srgbClr val="B80000"/>
-                </a:solidFill>
-                <a:latin typeface="Red Hat Display"/>
-              </a:rPr>
-              <a:t>MEDIA PASS</a:t>
-            </a:r>
-          </a:p>
-        </p:txBody>
-      </p:sp>
       <p:pic>
         <p:nvPicPr>
-          <p:cNvPr id="24" name="Picture 23" descr="eye_slate.png"/>
+          <p:cNvPr id="7" name="Picture 6" descr="03-what-you-built.png"/>
           <p:cNvPicPr>
             <a:picLocks noChangeAspect="1"/>
           </p:cNvPicPr>
           <p:nvPr/>
         </p:nvPicPr>
         <p:blipFill>
-          <a:blip r:embed="rId4"/>
+          <a:blip r:embed="rId3"/>
           <a:stretch>
             <a:fillRect/>
           </a:stretch>
         </p:blipFill>
         <p:spPr>
           <a:xfrm>
-            <a:off x="8843619" y="3108960"/>
-            <a:ext cx="475488" cy="475488"/>
+            <a:off x="1042416" y="3351066"/>
+            <a:ext cx="10106863" cy="1756067"/>
           </a:xfrm>
           <a:prstGeom prst="rect">
             <a:avLst/>
           </a:prstGeom>
         </p:spPr>
       </p:pic>
-      <p:sp>
-        <p:nvSpPr>
-          <p:cNvPr id="25" name="TextBox 24"/>
-          <p:cNvSpPr txBox="1"/>
-          <p:nvPr/>
-        </p:nvSpPr>
-        <p:spPr>
-          <a:xfrm>
-            <a:off x="7050024" y="3721608"/>
-            <a:ext cx="4062679" cy="1481328"/>
-          </a:xfrm>
-          <a:prstGeom prst="rect">
-            <a:avLst/>
-          </a:prstGeom>
-          <a:noFill/>
-        </p:spPr>
-        <p:txBody>
-          <a:bodyPr wrap="square" anchor="t" lIns="0" rIns="0" tIns="0" bIns="0">
-            <a:spAutoFit/>
-          </a:bodyPr>
-          <a:lstStyle/>
-          <a:p>
-            <a:pPr algn="l">
-              <a:lnSpc>
-                <a:spcPct val="120000"/>
-              </a:lnSpc>
-              <a:spcBef>
-                <a:spcPts val="0"/>
-              </a:spcBef>
-              <a:spcAft>
-                <a:spcPts val="0"/>
-              </a:spcAft>
-            </a:pPr>
-            <a:r>
-              <a:rPr sz="950" b="0">
-                <a:solidFill>
-                  <a:srgbClr val="8A9099"/>
-                </a:solidFill>
-                <a:latin typeface="Red Hat Text"/>
-              </a:rPr>
-              <a:t>Numbered arc strip: tour → promote-by-digest → scheduled import (break-fix) → pull secret → namespaced Template → read governance; footnote pointers to Trusted Software Supply Chain (signatures) and Ways to Build &amp; Deliver Apps (the catalog this governs).</a:t>
-            </a:r>
-          </a:p>
-        </p:txBody>
-      </p:sp>
       <p:cxnSp>
         <p:nvCxnSpPr>
-          <p:cNvPr id="26" name="Connector 25"/>
+          <p:cNvPr id="8" name="Connector 7"/>
           <p:cNvCxnSpPr/>
           <p:nvPr/>
         </p:nvCxnSpPr>
@@ -11786,7 +12061,7 @@
       </p:cxnSp>
       <p:sp>
         <p:nvSpPr>
-          <p:cNvPr id="27" name="TextBox 26"/>
+          <p:cNvPr id="9" name="TextBox 8"/>
           <p:cNvSpPr txBox="1"/>
           <p:nvPr/>
         </p:nvSpPr>
@@ -11831,7 +12106,7 @@
       </p:sp>
       <p:sp>
         <p:nvSpPr>
-          <p:cNvPr id="28" name="TextBox 27"/>
+          <p:cNvPr id="10" name="TextBox 9"/>
           <p:cNvSpPr txBox="1"/>
           <p:nvPr/>
         </p:nvSpPr>
@@ -11869,7 +12144,7 @@
                 </a:solidFill>
                 <a:latin typeface="Red Hat Text"/>
               </a:rPr>
-              <a:t>7</a:t>
+              <a:t>8</a:t>
             </a:r>
           </a:p>
         </p:txBody>
